--- a/exam-generator/sp025-exam-generator/c1/files.pptx
+++ b/exam-generator/sp025-exam-generator/c1/files.pptx
@@ -5,12 +5,18 @@
     <p:sldMasterId id="2147483648" r:id="rId1"/>
   </p:sldMasterIdLst>
   <p:notesMasterIdLst>
-    <p:notesMasterId r:id="rId5"/>
+    <p:notesMasterId r:id="rId11"/>
   </p:notesMasterIdLst>
   <p:sldIdLst>
     <p:sldId id="256" r:id="rId2"/>
     <p:sldId id="257" r:id="rId3"/>
     <p:sldId id="258" r:id="rId4"/>
+    <p:sldId id="265" r:id="rId5"/>
+    <p:sldId id="266" r:id="rId6"/>
+    <p:sldId id="267" r:id="rId7"/>
+    <p:sldId id="268" r:id="rId8"/>
+    <p:sldId id="269" r:id="rId9"/>
+    <p:sldId id="270" r:id="rId10"/>
   </p:sldIdLst>
   <p:sldSz cx="12192000" cy="6858000"/>
   <p:notesSz cx="6858000" cy="9144000"/>
@@ -109,6 +115,11 @@
       </a:defRPr>
     </a:lvl9pPr>
   </p:defaultTextStyle>
+  <p:extLst>
+    <p:ext uri="{EFAFB233-063F-42B5-8137-9DF3F51BA10A}">
+      <p15:sldGuideLst xmlns:p15="http://schemas.microsoft.com/office/powerpoint/2012/main"/>
+    </p:ext>
+  </p:extLst>
 </p:presentation>
 </file>
 
@@ -194,7 +205,7 @@
           <a:p>
             <a:fld id="{41C2071B-C938-43B8-86ED-532A4DF34259}" type="datetimeFigureOut">
               <a:rPr lang="en-MY" smtClean="0"/>
-              <a:t>16/3/2026</a:t>
+              <a:t>16/4/2026</a:t>
             </a:fld>
             <a:endParaRPr lang="en-MY"/>
           </a:p>
@@ -549,6 +560,90 @@
 </p:notes>
 </file>
 
+<file path=ppt/notesSlides/notesSlide2.xml><?xml version="1.0" encoding="utf-8"?>
+<p:notes xmlns:a="http://schemas.openxmlformats.org/drawingml/2006/main" xmlns:r="http://schemas.openxmlformats.org/officeDocument/2006/relationships" xmlns:p="http://schemas.openxmlformats.org/presentationml/2006/main">
+  <p:cSld>
+    <p:spTree>
+      <p:nvGrpSpPr>
+        <p:cNvPr id="1" name=""/>
+        <p:cNvGrpSpPr/>
+        <p:nvPr/>
+      </p:nvGrpSpPr>
+      <p:grpSpPr>
+        <a:xfrm>
+          <a:off x="0" y="0"/>
+          <a:ext cx="0" cy="0"/>
+          <a:chOff x="0" y="0"/>
+          <a:chExt cx="0" cy="0"/>
+        </a:xfrm>
+      </p:grpSpPr>
+      <p:sp>
+        <p:nvSpPr>
+          <p:cNvPr id="2" name="Slide Image Placeholder 1"/>
+          <p:cNvSpPr>
+            <a:spLocks noGrp="1" noRot="1" noChangeAspect="1"/>
+          </p:cNvSpPr>
+          <p:nvPr>
+            <p:ph type="sldImg"/>
+          </p:nvPr>
+        </p:nvSpPr>
+        <p:spPr/>
+      </p:sp>
+      <p:sp>
+        <p:nvSpPr>
+          <p:cNvPr id="3" name="Notes Placeholder 2"/>
+          <p:cNvSpPr>
+            <a:spLocks noGrp="1"/>
+          </p:cNvSpPr>
+          <p:nvPr>
+            <p:ph type="body" idx="1"/>
+          </p:nvPr>
+        </p:nvSpPr>
+        <p:spPr/>
+        <p:txBody>
+          <a:bodyPr/>
+          <a:lstStyle/>
+          <a:p>
+            <a:endParaRPr lang="en-MY" dirty="0"/>
+          </a:p>
+        </p:txBody>
+      </p:sp>
+      <p:sp>
+        <p:nvSpPr>
+          <p:cNvPr id="4" name="Slide Number Placeholder 3"/>
+          <p:cNvSpPr>
+            <a:spLocks noGrp="1"/>
+          </p:cNvSpPr>
+          <p:nvPr>
+            <p:ph type="sldNum" sz="quarter" idx="5"/>
+          </p:nvPr>
+        </p:nvSpPr>
+        <p:spPr/>
+        <p:txBody>
+          <a:bodyPr/>
+          <a:lstStyle/>
+          <a:p>
+            <a:fld id="{40D751DC-A03C-41D3-8164-F52DCCFC3959}" type="slidenum">
+              <a:rPr lang="en-MY" smtClean="0"/>
+              <a:t>5</a:t>
+            </a:fld>
+            <a:endParaRPr lang="en-MY"/>
+          </a:p>
+        </p:txBody>
+      </p:sp>
+    </p:spTree>
+    <p:extLst>
+      <p:ext uri="{BB962C8B-B14F-4D97-AF65-F5344CB8AC3E}">
+        <p14:creationId xmlns:p14="http://schemas.microsoft.com/office/powerpoint/2010/main" val="3968109184"/>
+      </p:ext>
+    </p:extLst>
+  </p:cSld>
+  <p:clrMapOvr>
+    <a:masterClrMapping/>
+  </p:clrMapOvr>
+</p:notes>
+</file>
+
 <file path=ppt/slideLayouts/slideLayout1.xml><?xml version="1.0" encoding="utf-8"?>
 <p:sldLayout xmlns:a="http://schemas.openxmlformats.org/drawingml/2006/main" xmlns:r="http://schemas.openxmlformats.org/officeDocument/2006/relationships" xmlns:p="http://schemas.openxmlformats.org/presentationml/2006/main" type="title" preserve="1">
   <p:cSld name="Title Slide">
@@ -698,7 +793,7 @@
           <a:p>
             <a:fld id="{DBA56312-4E88-4A31-B42E-95F0AF521EC9}" type="datetimeFigureOut">
               <a:rPr lang="en-MY" smtClean="0"/>
-              <a:t>16/3/2026</a:t>
+              <a:t>16/4/2026</a:t>
             </a:fld>
             <a:endParaRPr lang="en-MY"/>
           </a:p>
@@ -898,7 +993,7 @@
           <a:p>
             <a:fld id="{DBA56312-4E88-4A31-B42E-95F0AF521EC9}" type="datetimeFigureOut">
               <a:rPr lang="en-MY" smtClean="0"/>
-              <a:t>16/3/2026</a:t>
+              <a:t>16/4/2026</a:t>
             </a:fld>
             <a:endParaRPr lang="en-MY"/>
           </a:p>
@@ -1108,7 +1203,7 @@
           <a:p>
             <a:fld id="{DBA56312-4E88-4A31-B42E-95F0AF521EC9}" type="datetimeFigureOut">
               <a:rPr lang="en-MY" smtClean="0"/>
-              <a:t>16/3/2026</a:t>
+              <a:t>16/4/2026</a:t>
             </a:fld>
             <a:endParaRPr lang="en-MY"/>
           </a:p>
@@ -1308,7 +1403,7 @@
           <a:p>
             <a:fld id="{DBA56312-4E88-4A31-B42E-95F0AF521EC9}" type="datetimeFigureOut">
               <a:rPr lang="en-MY" smtClean="0"/>
-              <a:t>16/3/2026</a:t>
+              <a:t>16/4/2026</a:t>
             </a:fld>
             <a:endParaRPr lang="en-MY"/>
           </a:p>
@@ -1584,7 +1679,7 @@
           <a:p>
             <a:fld id="{DBA56312-4E88-4A31-B42E-95F0AF521EC9}" type="datetimeFigureOut">
               <a:rPr lang="en-MY" smtClean="0"/>
-              <a:t>16/3/2026</a:t>
+              <a:t>16/4/2026</a:t>
             </a:fld>
             <a:endParaRPr lang="en-MY"/>
           </a:p>
@@ -1852,7 +1947,7 @@
           <a:p>
             <a:fld id="{DBA56312-4E88-4A31-B42E-95F0AF521EC9}" type="datetimeFigureOut">
               <a:rPr lang="en-MY" smtClean="0"/>
-              <a:t>16/3/2026</a:t>
+              <a:t>16/4/2026</a:t>
             </a:fld>
             <a:endParaRPr lang="en-MY"/>
           </a:p>
@@ -2267,7 +2362,7 @@
           <a:p>
             <a:fld id="{DBA56312-4E88-4A31-B42E-95F0AF521EC9}" type="datetimeFigureOut">
               <a:rPr lang="en-MY" smtClean="0"/>
-              <a:t>16/3/2026</a:t>
+              <a:t>16/4/2026</a:t>
             </a:fld>
             <a:endParaRPr lang="en-MY"/>
           </a:p>
@@ -2409,7 +2504,7 @@
           <a:p>
             <a:fld id="{DBA56312-4E88-4A31-B42E-95F0AF521EC9}" type="datetimeFigureOut">
               <a:rPr lang="en-MY" smtClean="0"/>
-              <a:t>16/3/2026</a:t>
+              <a:t>16/4/2026</a:t>
             </a:fld>
             <a:endParaRPr lang="en-MY"/>
           </a:p>
@@ -2522,7 +2617,7 @@
           <a:p>
             <a:fld id="{DBA56312-4E88-4A31-B42E-95F0AF521EC9}" type="datetimeFigureOut">
               <a:rPr lang="en-MY" smtClean="0"/>
-              <a:t>16/3/2026</a:t>
+              <a:t>16/4/2026</a:t>
             </a:fld>
             <a:endParaRPr lang="en-MY"/>
           </a:p>
@@ -2835,7 +2930,7 @@
           <a:p>
             <a:fld id="{DBA56312-4E88-4A31-B42E-95F0AF521EC9}" type="datetimeFigureOut">
               <a:rPr lang="en-MY" smtClean="0"/>
-              <a:t>16/3/2026</a:t>
+              <a:t>16/4/2026</a:t>
             </a:fld>
             <a:endParaRPr lang="en-MY"/>
           </a:p>
@@ -3124,7 +3219,7 @@
           <a:p>
             <a:fld id="{DBA56312-4E88-4A31-B42E-95F0AF521EC9}" type="datetimeFigureOut">
               <a:rPr lang="en-MY" smtClean="0"/>
-              <a:t>16/3/2026</a:t>
+              <a:t>16/4/2026</a:t>
             </a:fld>
             <a:endParaRPr lang="en-MY"/>
           </a:p>
@@ -3367,7 +3462,7 @@
           <a:p>
             <a:fld id="{DBA56312-4E88-4A31-B42E-95F0AF521EC9}" type="datetimeFigureOut">
               <a:rPr lang="en-MY" smtClean="0"/>
-              <a:t>16/3/2026</a:t>
+              <a:t>16/4/2026</a:t>
             </a:fld>
             <a:endParaRPr lang="en-MY"/>
           </a:p>
@@ -4269,6 +4364,3610 @@
     <p:extLst>
       <p:ext uri="{BB962C8B-B14F-4D97-AF65-F5344CB8AC3E}">
         <p14:creationId xmlns:p14="http://schemas.microsoft.com/office/powerpoint/2010/main" val="3351862758"/>
+      </p:ext>
+    </p:extLst>
+  </p:cSld>
+  <p:clrMapOvr>
+    <a:masterClrMapping/>
+  </p:clrMapOvr>
+</p:sld>
+</file>
+
+<file path=ppt/slides/slide4.xml><?xml version="1.0" encoding="utf-8"?>
+<p:sld xmlns:a="http://schemas.openxmlformats.org/drawingml/2006/main" xmlns:r="http://schemas.openxmlformats.org/officeDocument/2006/relationships" xmlns:p="http://schemas.openxmlformats.org/presentationml/2006/main">
+  <p:cSld>
+    <p:spTree>
+      <p:nvGrpSpPr>
+        <p:cNvPr id="1" name=""/>
+        <p:cNvGrpSpPr/>
+        <p:nvPr/>
+      </p:nvGrpSpPr>
+      <p:grpSpPr>
+        <a:xfrm>
+          <a:off x="0" y="0"/>
+          <a:ext cx="0" cy="0"/>
+          <a:chOff x="0" y="0"/>
+          <a:chExt cx="0" cy="0"/>
+        </a:xfrm>
+      </p:grpSpPr>
+      <p:sp>
+        <p:nvSpPr>
+          <p:cNvPr id="5" name="TextBox 4">
+            <a:extLst>
+              <a:ext uri="{FF2B5EF4-FFF2-40B4-BE49-F238E27FC236}">
+                <a16:creationId xmlns:a16="http://schemas.microsoft.com/office/drawing/2014/main" id="{60693A95-9D45-1777-4F1C-ECEA9C359A07}"/>
+              </a:ext>
+            </a:extLst>
+          </p:cNvPr>
+          <p:cNvSpPr txBox="1"/>
+          <p:nvPr/>
+        </p:nvSpPr>
+        <p:spPr>
+          <a:xfrm>
+            <a:off x="3693806" y="568404"/>
+            <a:ext cx="7503846" cy="1200329"/>
+          </a:xfrm>
+          <a:prstGeom prst="rect">
+            <a:avLst/>
+          </a:prstGeom>
+          <a:noFill/>
+        </p:spPr>
+        <p:txBody>
+          <a:bodyPr wrap="square">
+            <a:spAutoFit/>
+          </a:bodyPr>
+          <a:lstStyle/>
+          <a:p>
+            <a:pPr marL="650240" marR="629285" algn="just">
+              <a:spcBef>
+                <a:spcPts val="1135"/>
+              </a:spcBef>
+              <a:buNone/>
+            </a:pPr>
+            <a:r>
+              <a:rPr lang="ms-MY" sz="1800" dirty="0">
+                <a:effectLst/>
+                <a:latin typeface="Times New Roman" panose="02020603050405020304" pitchFamily="18" charset="0"/>
+                <a:ea typeface="Times New Roman" panose="02020603050405020304" pitchFamily="18" charset="0"/>
+              </a:rPr>
+              <a:t>1   A proton is released from rest in a uniform magnetic field between two parallel plates that are separated by 5 cm as shown in </a:t>
+            </a:r>
+            <a:r>
+              <a:rPr lang="ms-MY" sz="1800" b="1" dirty="0">
+                <a:effectLst/>
+                <a:latin typeface="Times New Roman" panose="02020603050405020304" pitchFamily="18" charset="0"/>
+                <a:ea typeface="Times New Roman" panose="02020603050405020304" pitchFamily="18" charset="0"/>
+              </a:rPr>
+              <a:t>FIGURE 1</a:t>
+            </a:r>
+            <a:r>
+              <a:rPr lang="ms-MY" sz="1800" dirty="0">
+                <a:effectLst/>
+                <a:latin typeface="Times New Roman" panose="02020603050405020304" pitchFamily="18" charset="0"/>
+                <a:ea typeface="Times New Roman" panose="02020603050405020304" pitchFamily="18" charset="0"/>
+              </a:rPr>
+              <a:t>. The electric field strength between the plates is</a:t>
+            </a:r>
+            <a:r>
+              <a:rPr lang="ms-MY" sz="1800" spc="200" dirty="0">
+                <a:effectLst/>
+                <a:latin typeface="Times New Roman" panose="02020603050405020304" pitchFamily="18" charset="0"/>
+                <a:ea typeface="Times New Roman" panose="02020603050405020304" pitchFamily="18" charset="0"/>
+              </a:rPr>
+              <a:t> </a:t>
+            </a:r>
+            <a:r>
+              <a:rPr lang="ms-MY" sz="1800" dirty="0">
+                <a:effectLst/>
+                <a:latin typeface="Times New Roman" panose="02020603050405020304" pitchFamily="18" charset="0"/>
+                <a:ea typeface="Times New Roman" panose="02020603050405020304" pitchFamily="18" charset="0"/>
+              </a:rPr>
+              <a:t>5000 NC</a:t>
+            </a:r>
+            <a:r>
+              <a:rPr lang="ms-MY" sz="1800" baseline="30000" dirty="0">
+                <a:effectLst/>
+                <a:latin typeface="Times New Roman" panose="02020603050405020304" pitchFamily="18" charset="0"/>
+                <a:ea typeface="Times New Roman" panose="02020603050405020304" pitchFamily="18" charset="0"/>
+              </a:rPr>
+              <a:t>−1</a:t>
+            </a:r>
+            <a:r>
+              <a:rPr lang="ms-MY" sz="1800" dirty="0">
+                <a:effectLst/>
+                <a:latin typeface="Times New Roman" panose="02020603050405020304" pitchFamily="18" charset="0"/>
+                <a:ea typeface="Times New Roman" panose="02020603050405020304" pitchFamily="18" charset="0"/>
+              </a:rPr>
+              <a:t>. Calculate the</a:t>
+            </a:r>
+            <a:endParaRPr lang="en-MY" sz="1800" dirty="0">
+              <a:effectLst/>
+              <a:latin typeface="Times New Roman" panose="02020603050405020304" pitchFamily="18" charset="0"/>
+              <a:ea typeface="Times New Roman" panose="02020603050405020304" pitchFamily="18" charset="0"/>
+            </a:endParaRPr>
+          </a:p>
+        </p:txBody>
+      </p:sp>
+      <p:grpSp>
+        <p:nvGrpSpPr>
+          <p:cNvPr id="6" name="Group 5">
+            <a:extLst>
+              <a:ext uri="{FF2B5EF4-FFF2-40B4-BE49-F238E27FC236}">
+                <a16:creationId xmlns:a16="http://schemas.microsoft.com/office/drawing/2014/main" id="{4E51B9F4-2510-BDE6-3B41-12344E220CAD}"/>
+              </a:ext>
+            </a:extLst>
+          </p:cNvPr>
+          <p:cNvGrpSpPr>
+            <a:grpSpLocks/>
+          </p:cNvGrpSpPr>
+          <p:nvPr/>
+        </p:nvGrpSpPr>
+        <p:grpSpPr>
+          <a:xfrm>
+            <a:off x="440100" y="896788"/>
+            <a:ext cx="3606539" cy="2262157"/>
+            <a:chOff x="0" y="0"/>
+            <a:chExt cx="2075940" cy="815339"/>
+          </a:xfrm>
+        </p:grpSpPr>
+        <p:sp>
+          <p:nvSpPr>
+            <p:cNvPr id="7" name="Graphic 145">
+              <a:extLst>
+                <a:ext uri="{FF2B5EF4-FFF2-40B4-BE49-F238E27FC236}">
+                  <a16:creationId xmlns:a16="http://schemas.microsoft.com/office/drawing/2014/main" id="{9144FCD4-C665-5C34-A0E6-C25822757106}"/>
+                </a:ext>
+              </a:extLst>
+            </p:cNvPr>
+            <p:cNvSpPr/>
+            <p:nvPr/>
+          </p:nvSpPr>
+          <p:spPr>
+            <a:xfrm>
+              <a:off x="0" y="210184"/>
+              <a:ext cx="67310" cy="554355"/>
+            </a:xfrm>
+            <a:custGeom>
+              <a:avLst/>
+              <a:gdLst/>
+              <a:ahLst/>
+              <a:cxnLst/>
+              <a:rect l="l" t="t" r="r" b="b"/>
+              <a:pathLst>
+                <a:path w="67310" h="554355">
+                  <a:moveTo>
+                    <a:pt x="2667" y="498728"/>
+                  </a:moveTo>
+                  <a:lnTo>
+                    <a:pt x="1524" y="498728"/>
+                  </a:lnTo>
+                  <a:lnTo>
+                    <a:pt x="1016" y="498982"/>
+                  </a:lnTo>
+                  <a:lnTo>
+                    <a:pt x="254" y="499491"/>
+                  </a:lnTo>
+                  <a:lnTo>
+                    <a:pt x="0" y="500506"/>
+                  </a:lnTo>
+                  <a:lnTo>
+                    <a:pt x="507" y="501142"/>
+                  </a:lnTo>
+                  <a:lnTo>
+                    <a:pt x="33528" y="554101"/>
+                  </a:lnTo>
+                  <a:lnTo>
+                    <a:pt x="35356" y="551179"/>
+                  </a:lnTo>
+                  <a:lnTo>
+                    <a:pt x="32004" y="551179"/>
+                  </a:lnTo>
+                  <a:lnTo>
+                    <a:pt x="32004" y="545617"/>
+                  </a:lnTo>
+                  <a:lnTo>
+                    <a:pt x="3175" y="499491"/>
+                  </a:lnTo>
+                  <a:lnTo>
+                    <a:pt x="2667" y="498728"/>
+                  </a:lnTo>
+                  <a:close/>
+                </a:path>
+                <a:path w="67310" h="554355">
+                  <a:moveTo>
+                    <a:pt x="32004" y="545617"/>
+                  </a:moveTo>
+                  <a:lnTo>
+                    <a:pt x="32004" y="551179"/>
+                  </a:lnTo>
+                  <a:lnTo>
+                    <a:pt x="35179" y="551179"/>
+                  </a:lnTo>
+                  <a:lnTo>
+                    <a:pt x="35179" y="550291"/>
+                  </a:lnTo>
+                  <a:lnTo>
+                    <a:pt x="32257" y="550291"/>
+                  </a:lnTo>
+                  <a:lnTo>
+                    <a:pt x="33591" y="548157"/>
+                  </a:lnTo>
+                  <a:lnTo>
+                    <a:pt x="32004" y="545617"/>
+                  </a:lnTo>
+                  <a:close/>
+                </a:path>
+                <a:path w="67310" h="554355">
+                  <a:moveTo>
+                    <a:pt x="65659" y="498728"/>
+                  </a:moveTo>
+                  <a:lnTo>
+                    <a:pt x="64388" y="498728"/>
+                  </a:lnTo>
+                  <a:lnTo>
+                    <a:pt x="64007" y="499491"/>
+                  </a:lnTo>
+                  <a:lnTo>
+                    <a:pt x="35179" y="545617"/>
+                  </a:lnTo>
+                  <a:lnTo>
+                    <a:pt x="35179" y="551179"/>
+                  </a:lnTo>
+                  <a:lnTo>
+                    <a:pt x="35356" y="551179"/>
+                  </a:lnTo>
+                  <a:lnTo>
+                    <a:pt x="66675" y="501142"/>
+                  </a:lnTo>
+                  <a:lnTo>
+                    <a:pt x="67182" y="500506"/>
+                  </a:lnTo>
+                  <a:lnTo>
+                    <a:pt x="66929" y="499491"/>
+                  </a:lnTo>
+                  <a:lnTo>
+                    <a:pt x="66167" y="498982"/>
+                  </a:lnTo>
+                  <a:lnTo>
+                    <a:pt x="65659" y="498728"/>
+                  </a:lnTo>
+                  <a:close/>
+                </a:path>
+                <a:path w="67310" h="554355">
+                  <a:moveTo>
+                    <a:pt x="33591" y="548157"/>
+                  </a:moveTo>
+                  <a:lnTo>
+                    <a:pt x="32257" y="550291"/>
+                  </a:lnTo>
+                  <a:lnTo>
+                    <a:pt x="34925" y="550291"/>
+                  </a:lnTo>
+                  <a:lnTo>
+                    <a:pt x="33591" y="548157"/>
+                  </a:lnTo>
+                  <a:close/>
+                </a:path>
+                <a:path w="67310" h="554355">
+                  <a:moveTo>
+                    <a:pt x="35179" y="545617"/>
+                  </a:moveTo>
+                  <a:lnTo>
+                    <a:pt x="33591" y="548157"/>
+                  </a:lnTo>
+                  <a:lnTo>
+                    <a:pt x="34925" y="550291"/>
+                  </a:lnTo>
+                  <a:lnTo>
+                    <a:pt x="35179" y="550291"/>
+                  </a:lnTo>
+                  <a:lnTo>
+                    <a:pt x="35179" y="545617"/>
+                  </a:lnTo>
+                  <a:close/>
+                </a:path>
+                <a:path w="67310" h="554355">
+                  <a:moveTo>
+                    <a:pt x="33591" y="5943"/>
+                  </a:moveTo>
+                  <a:lnTo>
+                    <a:pt x="32004" y="8483"/>
+                  </a:lnTo>
+                  <a:lnTo>
+                    <a:pt x="32004" y="545617"/>
+                  </a:lnTo>
+                  <a:lnTo>
+                    <a:pt x="33591" y="548157"/>
+                  </a:lnTo>
+                  <a:lnTo>
+                    <a:pt x="35178" y="545617"/>
+                  </a:lnTo>
+                  <a:lnTo>
+                    <a:pt x="35179" y="8483"/>
+                  </a:lnTo>
+                  <a:lnTo>
+                    <a:pt x="33591" y="5943"/>
+                  </a:lnTo>
+                  <a:close/>
+                </a:path>
+                <a:path w="67310" h="554355">
+                  <a:moveTo>
+                    <a:pt x="33528" y="0"/>
+                  </a:moveTo>
+                  <a:lnTo>
+                    <a:pt x="507" y="52958"/>
+                  </a:lnTo>
+                  <a:lnTo>
+                    <a:pt x="0" y="53594"/>
+                  </a:lnTo>
+                  <a:lnTo>
+                    <a:pt x="254" y="54609"/>
+                  </a:lnTo>
+                  <a:lnTo>
+                    <a:pt x="1016" y="55118"/>
+                  </a:lnTo>
+                  <a:lnTo>
+                    <a:pt x="1778" y="55499"/>
+                  </a:lnTo>
+                  <a:lnTo>
+                    <a:pt x="2582" y="55499"/>
+                  </a:lnTo>
+                  <a:lnTo>
+                    <a:pt x="3175" y="54609"/>
+                  </a:lnTo>
+                  <a:lnTo>
+                    <a:pt x="32003" y="8483"/>
+                  </a:lnTo>
+                  <a:lnTo>
+                    <a:pt x="32004" y="2921"/>
+                  </a:lnTo>
+                  <a:lnTo>
+                    <a:pt x="35356" y="2921"/>
+                  </a:lnTo>
+                  <a:lnTo>
+                    <a:pt x="33528" y="0"/>
+                  </a:lnTo>
+                  <a:close/>
+                </a:path>
+                <a:path w="67310" h="554355">
+                  <a:moveTo>
+                    <a:pt x="35356" y="2921"/>
+                  </a:moveTo>
+                  <a:lnTo>
+                    <a:pt x="35179" y="2921"/>
+                  </a:lnTo>
+                  <a:lnTo>
+                    <a:pt x="35179" y="8483"/>
+                  </a:lnTo>
+                  <a:lnTo>
+                    <a:pt x="64007" y="54609"/>
+                  </a:lnTo>
+                  <a:lnTo>
+                    <a:pt x="64452" y="55499"/>
+                  </a:lnTo>
+                  <a:lnTo>
+                    <a:pt x="65405" y="55499"/>
+                  </a:lnTo>
+                  <a:lnTo>
+                    <a:pt x="66167" y="55118"/>
+                  </a:lnTo>
+                  <a:lnTo>
+                    <a:pt x="66929" y="54609"/>
+                  </a:lnTo>
+                  <a:lnTo>
+                    <a:pt x="67182" y="53594"/>
+                  </a:lnTo>
+                  <a:lnTo>
+                    <a:pt x="66675" y="52958"/>
+                  </a:lnTo>
+                  <a:lnTo>
+                    <a:pt x="35356" y="2921"/>
+                  </a:lnTo>
+                  <a:close/>
+                </a:path>
+                <a:path w="67310" h="554355">
+                  <a:moveTo>
+                    <a:pt x="35179" y="2921"/>
+                  </a:moveTo>
+                  <a:lnTo>
+                    <a:pt x="32004" y="2921"/>
+                  </a:lnTo>
+                  <a:lnTo>
+                    <a:pt x="32004" y="8483"/>
+                  </a:lnTo>
+                  <a:lnTo>
+                    <a:pt x="33591" y="5943"/>
+                  </a:lnTo>
+                  <a:lnTo>
+                    <a:pt x="32257" y="3809"/>
+                  </a:lnTo>
+                  <a:lnTo>
+                    <a:pt x="35179" y="3809"/>
+                  </a:lnTo>
+                  <a:lnTo>
+                    <a:pt x="35179" y="2921"/>
+                  </a:lnTo>
+                  <a:close/>
+                </a:path>
+                <a:path w="67310" h="554355">
+                  <a:moveTo>
+                    <a:pt x="35179" y="3809"/>
+                  </a:moveTo>
+                  <a:lnTo>
+                    <a:pt x="34925" y="3809"/>
+                  </a:lnTo>
+                  <a:lnTo>
+                    <a:pt x="33591" y="5943"/>
+                  </a:lnTo>
+                  <a:lnTo>
+                    <a:pt x="35179" y="8483"/>
+                  </a:lnTo>
+                  <a:lnTo>
+                    <a:pt x="35179" y="3809"/>
+                  </a:lnTo>
+                  <a:close/>
+                </a:path>
+                <a:path w="67310" h="554355">
+                  <a:moveTo>
+                    <a:pt x="34925" y="3809"/>
+                  </a:moveTo>
+                  <a:lnTo>
+                    <a:pt x="32257" y="3809"/>
+                  </a:lnTo>
+                  <a:lnTo>
+                    <a:pt x="33591" y="5943"/>
+                  </a:lnTo>
+                  <a:lnTo>
+                    <a:pt x="34925" y="3809"/>
+                  </a:lnTo>
+                  <a:close/>
+                </a:path>
+              </a:pathLst>
+            </a:custGeom>
+            <a:solidFill>
+              <a:srgbClr val="000000"/>
+            </a:solidFill>
+          </p:spPr>
+          <p:txBody>
+            <a:bodyPr wrap="square" lIns="0" tIns="0" rIns="0" bIns="0" rtlCol="0">
+              <a:prstTxWarp prst="textNoShape">
+                <a:avLst/>
+              </a:prstTxWarp>
+              <a:noAutofit/>
+            </a:bodyPr>
+            <a:lstStyle/>
+            <a:p>
+              <a:endParaRPr lang="en-MY"/>
+            </a:p>
+          </p:txBody>
+        </p:sp>
+        <p:sp>
+          <p:nvSpPr>
+            <p:cNvPr id="8" name="Graphic 146">
+              <a:extLst>
+                <a:ext uri="{FF2B5EF4-FFF2-40B4-BE49-F238E27FC236}">
+                  <a16:creationId xmlns:a16="http://schemas.microsoft.com/office/drawing/2014/main" id="{3D9FA75C-85BE-10A5-D322-DD93E624F440}"/>
+                </a:ext>
+              </a:extLst>
+            </p:cNvPr>
+            <p:cNvSpPr/>
+            <p:nvPr/>
+          </p:nvSpPr>
+          <p:spPr>
+            <a:xfrm>
+              <a:off x="22732" y="175132"/>
+              <a:ext cx="2050414" cy="1270"/>
+            </a:xfrm>
+            <a:custGeom>
+              <a:avLst/>
+              <a:gdLst/>
+              <a:ahLst/>
+              <a:cxnLst/>
+              <a:rect l="l" t="t" r="r" b="b"/>
+              <a:pathLst>
+                <a:path w="2050414">
+                  <a:moveTo>
+                    <a:pt x="0" y="0"/>
+                  </a:moveTo>
+                  <a:lnTo>
+                    <a:pt x="2050288" y="0"/>
+                  </a:lnTo>
+                </a:path>
+              </a:pathLst>
+            </a:custGeom>
+            <a:ln w="57150">
+              <a:solidFill>
+                <a:srgbClr val="000000"/>
+              </a:solidFill>
+              <a:prstDash val="solid"/>
+            </a:ln>
+          </p:spPr>
+          <p:txBody>
+            <a:bodyPr wrap="square" lIns="0" tIns="0" rIns="0" bIns="0" rtlCol="0">
+              <a:prstTxWarp prst="textNoShape">
+                <a:avLst/>
+              </a:prstTxWarp>
+              <a:noAutofit/>
+            </a:bodyPr>
+            <a:lstStyle/>
+            <a:p>
+              <a:endParaRPr lang="en-MY"/>
+            </a:p>
+          </p:txBody>
+        </p:sp>
+        <p:sp>
+          <p:nvSpPr>
+            <p:cNvPr id="9" name="Graphic 147">
+              <a:extLst>
+                <a:ext uri="{FF2B5EF4-FFF2-40B4-BE49-F238E27FC236}">
+                  <a16:creationId xmlns:a16="http://schemas.microsoft.com/office/drawing/2014/main" id="{7A78B21F-D62C-30D5-0CC8-A270820C8EAE}"/>
+                </a:ext>
+              </a:extLst>
+            </p:cNvPr>
+            <p:cNvSpPr/>
+            <p:nvPr/>
+          </p:nvSpPr>
+          <p:spPr>
+            <a:xfrm>
+              <a:off x="41782" y="0"/>
+              <a:ext cx="1983739" cy="114935"/>
+            </a:xfrm>
+            <a:custGeom>
+              <a:avLst/>
+              <a:gdLst/>
+              <a:ahLst/>
+              <a:cxnLst/>
+              <a:rect l="l" t="t" r="r" b="b"/>
+              <a:pathLst>
+                <a:path w="1983739" h="114935">
+                  <a:moveTo>
+                    <a:pt x="0" y="53720"/>
+                  </a:moveTo>
+                  <a:lnTo>
+                    <a:pt x="109600" y="53720"/>
+                  </a:lnTo>
+                </a:path>
+                <a:path w="1983739" h="114935">
+                  <a:moveTo>
+                    <a:pt x="53721" y="0"/>
+                  </a:moveTo>
+                  <a:lnTo>
+                    <a:pt x="53721" y="107441"/>
+                  </a:lnTo>
+                </a:path>
+                <a:path w="1983739" h="114935">
+                  <a:moveTo>
+                    <a:pt x="220980" y="53593"/>
+                  </a:moveTo>
+                  <a:lnTo>
+                    <a:pt x="330200" y="53593"/>
+                  </a:lnTo>
+                </a:path>
+                <a:path w="1983739" h="114935">
+                  <a:moveTo>
+                    <a:pt x="274447" y="0"/>
+                  </a:moveTo>
+                  <a:lnTo>
+                    <a:pt x="274447" y="107187"/>
+                  </a:lnTo>
+                </a:path>
+                <a:path w="1983739" h="114935">
+                  <a:moveTo>
+                    <a:pt x="434339" y="53593"/>
+                  </a:moveTo>
+                  <a:lnTo>
+                    <a:pt x="543433" y="53593"/>
+                  </a:lnTo>
+                </a:path>
+                <a:path w="1983739" h="114935">
+                  <a:moveTo>
+                    <a:pt x="487807" y="0"/>
+                  </a:moveTo>
+                  <a:lnTo>
+                    <a:pt x="487807" y="107187"/>
+                  </a:lnTo>
+                </a:path>
+                <a:path w="1983739" h="114935">
+                  <a:moveTo>
+                    <a:pt x="643763" y="61213"/>
+                  </a:moveTo>
+                  <a:lnTo>
+                    <a:pt x="752983" y="61213"/>
+                  </a:lnTo>
+                </a:path>
+                <a:path w="1983739" h="114935">
+                  <a:moveTo>
+                    <a:pt x="697357" y="7619"/>
+                  </a:moveTo>
+                  <a:lnTo>
+                    <a:pt x="697357" y="114807"/>
+                  </a:lnTo>
+                </a:path>
+                <a:path w="1983739" h="114935">
+                  <a:moveTo>
+                    <a:pt x="845693" y="57403"/>
+                  </a:moveTo>
+                  <a:lnTo>
+                    <a:pt x="954913" y="57403"/>
+                  </a:lnTo>
+                </a:path>
+                <a:path w="1983739" h="114935">
+                  <a:moveTo>
+                    <a:pt x="899287" y="3809"/>
+                  </a:moveTo>
+                  <a:lnTo>
+                    <a:pt x="899287" y="110998"/>
+                  </a:lnTo>
+                </a:path>
+                <a:path w="1983739" h="114935">
+                  <a:moveTo>
+                    <a:pt x="1043813" y="61213"/>
+                  </a:moveTo>
+                  <a:lnTo>
+                    <a:pt x="1153033" y="61213"/>
+                  </a:lnTo>
+                </a:path>
+                <a:path w="1983739" h="114935">
+                  <a:moveTo>
+                    <a:pt x="1097407" y="7619"/>
+                  </a:moveTo>
+                  <a:lnTo>
+                    <a:pt x="1097407" y="114807"/>
+                  </a:lnTo>
+                </a:path>
+                <a:path w="1983739" h="114935">
+                  <a:moveTo>
+                    <a:pt x="1253363" y="61213"/>
+                  </a:moveTo>
+                  <a:lnTo>
+                    <a:pt x="1362583" y="61213"/>
+                  </a:lnTo>
+                </a:path>
+                <a:path w="1983739" h="114935">
+                  <a:moveTo>
+                    <a:pt x="1306957" y="7619"/>
+                  </a:moveTo>
+                  <a:lnTo>
+                    <a:pt x="1306957" y="114807"/>
+                  </a:lnTo>
+                </a:path>
+                <a:path w="1983739" h="114935">
+                  <a:moveTo>
+                    <a:pt x="1455293" y="61213"/>
+                  </a:moveTo>
+                  <a:lnTo>
+                    <a:pt x="1564513" y="61213"/>
+                  </a:lnTo>
+                </a:path>
+                <a:path w="1983739" h="114935">
+                  <a:moveTo>
+                    <a:pt x="1508887" y="7619"/>
+                  </a:moveTo>
+                  <a:lnTo>
+                    <a:pt x="1508887" y="114807"/>
+                  </a:lnTo>
+                </a:path>
+                <a:path w="1983739" h="114935">
+                  <a:moveTo>
+                    <a:pt x="1661033" y="61213"/>
+                  </a:moveTo>
+                  <a:lnTo>
+                    <a:pt x="1770252" y="61213"/>
+                  </a:lnTo>
+                </a:path>
+                <a:path w="1983739" h="114935">
+                  <a:moveTo>
+                    <a:pt x="1714627" y="7619"/>
+                  </a:moveTo>
+                  <a:lnTo>
+                    <a:pt x="1714627" y="114807"/>
+                  </a:lnTo>
+                </a:path>
+                <a:path w="1983739" h="114935">
+                  <a:moveTo>
+                    <a:pt x="1874393" y="61213"/>
+                  </a:moveTo>
+                  <a:lnTo>
+                    <a:pt x="1983613" y="61213"/>
+                  </a:lnTo>
+                </a:path>
+                <a:path w="1983739" h="114935">
+                  <a:moveTo>
+                    <a:pt x="1927987" y="7619"/>
+                  </a:moveTo>
+                  <a:lnTo>
+                    <a:pt x="1927987" y="114807"/>
+                  </a:lnTo>
+                </a:path>
+              </a:pathLst>
+            </a:custGeom>
+            <a:ln w="12700">
+              <a:solidFill>
+                <a:srgbClr val="000000"/>
+              </a:solidFill>
+              <a:prstDash val="solid"/>
+            </a:ln>
+          </p:spPr>
+          <p:txBody>
+            <a:bodyPr wrap="square" lIns="0" tIns="0" rIns="0" bIns="0" rtlCol="0">
+              <a:prstTxWarp prst="textNoShape">
+                <a:avLst/>
+              </a:prstTxWarp>
+              <a:noAutofit/>
+            </a:bodyPr>
+            <a:lstStyle/>
+            <a:p>
+              <a:endParaRPr lang="en-MY"/>
+            </a:p>
+          </p:txBody>
+        </p:sp>
+        <p:sp>
+          <p:nvSpPr>
+            <p:cNvPr id="10" name="Graphic 148">
+              <a:extLst>
+                <a:ext uri="{FF2B5EF4-FFF2-40B4-BE49-F238E27FC236}">
+                  <a16:creationId xmlns:a16="http://schemas.microsoft.com/office/drawing/2014/main" id="{59616FB7-B4AE-5368-4E51-BD819A06733D}"/>
+                </a:ext>
+              </a:extLst>
+            </p:cNvPr>
+            <p:cNvSpPr/>
+            <p:nvPr/>
+          </p:nvSpPr>
+          <p:spPr>
+            <a:xfrm>
+              <a:off x="25526" y="814069"/>
+              <a:ext cx="2050414" cy="1270"/>
+            </a:xfrm>
+            <a:custGeom>
+              <a:avLst/>
+              <a:gdLst/>
+              <a:ahLst/>
+              <a:cxnLst/>
+              <a:rect l="l" t="t" r="r" b="b"/>
+              <a:pathLst>
+                <a:path w="2050414">
+                  <a:moveTo>
+                    <a:pt x="0" y="0"/>
+                  </a:moveTo>
+                  <a:lnTo>
+                    <a:pt x="2050033" y="0"/>
+                  </a:lnTo>
+                </a:path>
+              </a:pathLst>
+            </a:custGeom>
+            <a:ln w="57150">
+              <a:solidFill>
+                <a:srgbClr val="000000"/>
+              </a:solidFill>
+              <a:prstDash val="solid"/>
+            </a:ln>
+          </p:spPr>
+          <p:txBody>
+            <a:bodyPr wrap="square" lIns="0" tIns="0" rIns="0" bIns="0" rtlCol="0">
+              <a:prstTxWarp prst="textNoShape">
+                <a:avLst/>
+              </a:prstTxWarp>
+              <a:noAutofit/>
+            </a:bodyPr>
+            <a:lstStyle/>
+            <a:p>
+              <a:endParaRPr lang="en-MY"/>
+            </a:p>
+          </p:txBody>
+        </p:sp>
+        <p:pic>
+          <p:nvPicPr>
+            <p:cNvPr id="11" name="Image 149">
+              <a:extLst>
+                <a:ext uri="{FF2B5EF4-FFF2-40B4-BE49-F238E27FC236}">
+                  <a16:creationId xmlns:a16="http://schemas.microsoft.com/office/drawing/2014/main" id="{7B93947E-1822-4CA3-9450-0C28379EC488}"/>
+                </a:ext>
+              </a:extLst>
+            </p:cNvPr>
+            <p:cNvPicPr/>
+            <p:nvPr/>
+          </p:nvPicPr>
+          <p:blipFill>
+            <a:blip r:embed="rId2" cstate="print"/>
+            <a:stretch>
+              <a:fillRect/>
+            </a:stretch>
+          </p:blipFill>
+          <p:spPr>
+            <a:xfrm>
+              <a:off x="906907" y="207263"/>
+              <a:ext cx="147954" cy="139573"/>
+            </a:xfrm>
+            <a:prstGeom prst="rect">
+              <a:avLst/>
+            </a:prstGeom>
+          </p:spPr>
+        </p:pic>
+      </p:grpSp>
+      <p:sp>
+        <p:nvSpPr>
+          <p:cNvPr id="13" name="TextBox 12">
+            <a:extLst>
+              <a:ext uri="{FF2B5EF4-FFF2-40B4-BE49-F238E27FC236}">
+                <a16:creationId xmlns:a16="http://schemas.microsoft.com/office/drawing/2014/main" id="{74F05CC4-9078-3BBD-633B-C826B145699B}"/>
+              </a:ext>
+            </a:extLst>
+          </p:cNvPr>
+          <p:cNvSpPr txBox="1"/>
+          <p:nvPr/>
+        </p:nvSpPr>
+        <p:spPr>
+          <a:xfrm>
+            <a:off x="4354734" y="1768733"/>
+            <a:ext cx="7151012" cy="2262158"/>
+          </a:xfrm>
+          <a:prstGeom prst="rect">
+            <a:avLst/>
+          </a:prstGeom>
+          <a:noFill/>
+        </p:spPr>
+        <p:txBody>
+          <a:bodyPr wrap="square">
+            <a:spAutoFit/>
+          </a:bodyPr>
+          <a:lstStyle/>
+          <a:p>
+            <a:pPr>
+              <a:spcBef>
+                <a:spcPts val="610"/>
+              </a:spcBef>
+              <a:buSzPts val="1100"/>
+              <a:tabLst>
+                <a:tab pos="950595" algn="l"/>
+              </a:tabLst>
+            </a:pPr>
+            <a:r>
+              <a:rPr lang="ms-MY" sz="1800" spc="0" dirty="0">
+                <a:effectLst/>
+                <a:latin typeface="Times New Roman" panose="02020603050405020304" pitchFamily="18" charset="0"/>
+                <a:ea typeface="Times New Roman" panose="02020603050405020304" pitchFamily="18" charset="0"/>
+              </a:rPr>
+              <a:t>(a)   magnitude</a:t>
+            </a:r>
+            <a:r>
+              <a:rPr lang="ms-MY" sz="1800" spc="-25" dirty="0">
+                <a:effectLst/>
+                <a:latin typeface="Times New Roman" panose="02020603050405020304" pitchFamily="18" charset="0"/>
+                <a:ea typeface="Times New Roman" panose="02020603050405020304" pitchFamily="18" charset="0"/>
+              </a:rPr>
+              <a:t> </a:t>
+            </a:r>
+            <a:r>
+              <a:rPr lang="ms-MY" sz="1800" spc="0" dirty="0">
+                <a:effectLst/>
+                <a:latin typeface="Times New Roman" panose="02020603050405020304" pitchFamily="18" charset="0"/>
+                <a:ea typeface="Times New Roman" panose="02020603050405020304" pitchFamily="18" charset="0"/>
+              </a:rPr>
+              <a:t>and</a:t>
+            </a:r>
+            <a:r>
+              <a:rPr lang="ms-MY" sz="1800" spc="-10" dirty="0">
+                <a:effectLst/>
+                <a:latin typeface="Times New Roman" panose="02020603050405020304" pitchFamily="18" charset="0"/>
+                <a:ea typeface="Times New Roman" panose="02020603050405020304" pitchFamily="18" charset="0"/>
+              </a:rPr>
+              <a:t> </a:t>
+            </a:r>
+            <a:r>
+              <a:rPr lang="ms-MY" sz="1800" spc="0" dirty="0">
+                <a:effectLst/>
+                <a:latin typeface="Times New Roman" panose="02020603050405020304" pitchFamily="18" charset="0"/>
+                <a:ea typeface="Times New Roman" panose="02020603050405020304" pitchFamily="18" charset="0"/>
+              </a:rPr>
+              <a:t>direction</a:t>
+            </a:r>
+            <a:r>
+              <a:rPr lang="ms-MY" sz="1800" spc="-10" dirty="0">
+                <a:effectLst/>
+                <a:latin typeface="Times New Roman" panose="02020603050405020304" pitchFamily="18" charset="0"/>
+                <a:ea typeface="Times New Roman" panose="02020603050405020304" pitchFamily="18" charset="0"/>
+              </a:rPr>
+              <a:t> </a:t>
+            </a:r>
+            <a:r>
+              <a:rPr lang="ms-MY" sz="1800" spc="0" dirty="0">
+                <a:effectLst/>
+                <a:latin typeface="Times New Roman" panose="02020603050405020304" pitchFamily="18" charset="0"/>
+                <a:ea typeface="Times New Roman" panose="02020603050405020304" pitchFamily="18" charset="0"/>
+              </a:rPr>
+              <a:t>of</a:t>
+            </a:r>
+            <a:r>
+              <a:rPr lang="ms-MY" sz="1800" spc="-25" dirty="0">
+                <a:effectLst/>
+                <a:latin typeface="Times New Roman" panose="02020603050405020304" pitchFamily="18" charset="0"/>
+                <a:ea typeface="Times New Roman" panose="02020603050405020304" pitchFamily="18" charset="0"/>
+              </a:rPr>
+              <a:t> </a:t>
+            </a:r>
+            <a:r>
+              <a:rPr lang="ms-MY" sz="1800" spc="0" dirty="0">
+                <a:effectLst/>
+                <a:latin typeface="Times New Roman" panose="02020603050405020304" pitchFamily="18" charset="0"/>
+                <a:ea typeface="Times New Roman" panose="02020603050405020304" pitchFamily="18" charset="0"/>
+              </a:rPr>
+              <a:t>electric</a:t>
+            </a:r>
+            <a:r>
+              <a:rPr lang="ms-MY" sz="1800" spc="-20" dirty="0">
+                <a:effectLst/>
+                <a:latin typeface="Times New Roman" panose="02020603050405020304" pitchFamily="18" charset="0"/>
+                <a:ea typeface="Times New Roman" panose="02020603050405020304" pitchFamily="18" charset="0"/>
+              </a:rPr>
+              <a:t> </a:t>
+            </a:r>
+            <a:r>
+              <a:rPr lang="ms-MY" sz="1800" spc="0" dirty="0">
+                <a:effectLst/>
+                <a:latin typeface="Times New Roman" panose="02020603050405020304" pitchFamily="18" charset="0"/>
+                <a:ea typeface="Times New Roman" panose="02020603050405020304" pitchFamily="18" charset="0"/>
+              </a:rPr>
+              <a:t>force</a:t>
+            </a:r>
+            <a:r>
+              <a:rPr lang="ms-MY" sz="1800" spc="-25" dirty="0">
+                <a:effectLst/>
+                <a:latin typeface="Times New Roman" panose="02020603050405020304" pitchFamily="18" charset="0"/>
+                <a:ea typeface="Times New Roman" panose="02020603050405020304" pitchFamily="18" charset="0"/>
+              </a:rPr>
+              <a:t> </a:t>
+            </a:r>
+            <a:r>
+              <a:rPr lang="ms-MY" sz="1800" spc="0" dirty="0">
+                <a:effectLst/>
+                <a:latin typeface="Times New Roman" panose="02020603050405020304" pitchFamily="18" charset="0"/>
+                <a:ea typeface="Times New Roman" panose="02020603050405020304" pitchFamily="18" charset="0"/>
+              </a:rPr>
+              <a:t>acted</a:t>
+            </a:r>
+            <a:r>
+              <a:rPr lang="ms-MY" sz="1800" spc="-10" dirty="0">
+                <a:effectLst/>
+                <a:latin typeface="Times New Roman" panose="02020603050405020304" pitchFamily="18" charset="0"/>
+                <a:ea typeface="Times New Roman" panose="02020603050405020304" pitchFamily="18" charset="0"/>
+              </a:rPr>
+              <a:t> </a:t>
+            </a:r>
+            <a:r>
+              <a:rPr lang="ms-MY" sz="1800" spc="0" dirty="0">
+                <a:effectLst/>
+                <a:latin typeface="Times New Roman" panose="02020603050405020304" pitchFamily="18" charset="0"/>
+                <a:ea typeface="Times New Roman" panose="02020603050405020304" pitchFamily="18" charset="0"/>
+              </a:rPr>
+              <a:t>on</a:t>
+            </a:r>
+            <a:r>
+              <a:rPr lang="ms-MY" sz="1800" spc="-25" dirty="0">
+                <a:effectLst/>
+                <a:latin typeface="Times New Roman" panose="02020603050405020304" pitchFamily="18" charset="0"/>
+                <a:ea typeface="Times New Roman" panose="02020603050405020304" pitchFamily="18" charset="0"/>
+              </a:rPr>
+              <a:t> </a:t>
+            </a:r>
+            <a:r>
+              <a:rPr lang="ms-MY" sz="1800" spc="0" dirty="0">
+                <a:effectLst/>
+                <a:latin typeface="Times New Roman" panose="02020603050405020304" pitchFamily="18" charset="0"/>
+                <a:ea typeface="Times New Roman" panose="02020603050405020304" pitchFamily="18" charset="0"/>
+              </a:rPr>
+              <a:t>the</a:t>
+            </a:r>
+            <a:r>
+              <a:rPr lang="ms-MY" sz="1800" spc="-20" dirty="0">
+                <a:effectLst/>
+                <a:latin typeface="Times New Roman" panose="02020603050405020304" pitchFamily="18" charset="0"/>
+                <a:ea typeface="Times New Roman" panose="02020603050405020304" pitchFamily="18" charset="0"/>
+              </a:rPr>
+              <a:t> </a:t>
+            </a:r>
+            <a:r>
+              <a:rPr lang="ms-MY" sz="1800" spc="-10" dirty="0">
+                <a:effectLst/>
+                <a:latin typeface="Times New Roman" panose="02020603050405020304" pitchFamily="18" charset="0"/>
+                <a:ea typeface="Times New Roman" panose="02020603050405020304" pitchFamily="18" charset="0"/>
+              </a:rPr>
+              <a:t>proton.							</a:t>
+            </a:r>
+            <a:r>
+              <a:rPr lang="ms-MY" dirty="0">
+                <a:latin typeface="Times New Roman" panose="02020603050405020304" pitchFamily="18" charset="0"/>
+                <a:ea typeface="Times New Roman" panose="02020603050405020304" pitchFamily="18" charset="0"/>
+              </a:rPr>
+              <a:t>[3 </a:t>
+            </a:r>
+            <a:r>
+              <a:rPr lang="ms-MY" i="1" spc="-10" dirty="0">
+                <a:latin typeface="Times New Roman" panose="02020603050405020304" pitchFamily="18" charset="0"/>
+                <a:ea typeface="Times New Roman" panose="02020603050405020304" pitchFamily="18" charset="0"/>
+              </a:rPr>
+              <a:t>marks</a:t>
+            </a:r>
+            <a:r>
+              <a:rPr lang="ms-MY" spc="-10" dirty="0">
+                <a:latin typeface="Times New Roman" panose="02020603050405020304" pitchFamily="18" charset="0"/>
+                <a:ea typeface="Times New Roman" panose="02020603050405020304" pitchFamily="18" charset="0"/>
+              </a:rPr>
+              <a:t>]</a:t>
+            </a:r>
+            <a:endParaRPr lang="en-MY" dirty="0">
+              <a:latin typeface="Times New Roman" panose="02020603050405020304" pitchFamily="18" charset="0"/>
+              <a:ea typeface="Times New Roman" panose="02020603050405020304" pitchFamily="18" charset="0"/>
+            </a:endParaRPr>
+          </a:p>
+          <a:p>
+            <a:pPr>
+              <a:spcBef>
+                <a:spcPts val="610"/>
+              </a:spcBef>
+              <a:buSzPts val="1100"/>
+              <a:tabLst>
+                <a:tab pos="950595" algn="l"/>
+              </a:tabLst>
+            </a:pPr>
+            <a:r>
+              <a:rPr lang="ms-MY" sz="1800" spc="0" dirty="0">
+                <a:effectLst/>
+                <a:latin typeface="Times New Roman" panose="02020603050405020304" pitchFamily="18" charset="0"/>
+                <a:ea typeface="Times New Roman" panose="02020603050405020304" pitchFamily="18" charset="0"/>
+              </a:rPr>
+              <a:t>(b)   acceleration</a:t>
+            </a:r>
+            <a:r>
+              <a:rPr lang="ms-MY" sz="1800" spc="-15" dirty="0">
+                <a:effectLst/>
+                <a:latin typeface="Times New Roman" panose="02020603050405020304" pitchFamily="18" charset="0"/>
+                <a:ea typeface="Times New Roman" panose="02020603050405020304" pitchFamily="18" charset="0"/>
+              </a:rPr>
+              <a:t> </a:t>
+            </a:r>
+            <a:r>
+              <a:rPr lang="ms-MY" sz="1800" spc="0" dirty="0">
+                <a:effectLst/>
+                <a:latin typeface="Times New Roman" panose="02020603050405020304" pitchFamily="18" charset="0"/>
+                <a:ea typeface="Times New Roman" panose="02020603050405020304" pitchFamily="18" charset="0"/>
+              </a:rPr>
+              <a:t>of</a:t>
+            </a:r>
+            <a:r>
+              <a:rPr lang="ms-MY" sz="1800" spc="-25" dirty="0">
+                <a:effectLst/>
+                <a:latin typeface="Times New Roman" panose="02020603050405020304" pitchFamily="18" charset="0"/>
+                <a:ea typeface="Times New Roman" panose="02020603050405020304" pitchFamily="18" charset="0"/>
+              </a:rPr>
+              <a:t> </a:t>
+            </a:r>
+            <a:r>
+              <a:rPr lang="ms-MY" sz="1800" spc="0" dirty="0">
+                <a:effectLst/>
+                <a:latin typeface="Times New Roman" panose="02020603050405020304" pitchFamily="18" charset="0"/>
+                <a:ea typeface="Times New Roman" panose="02020603050405020304" pitchFamily="18" charset="0"/>
+              </a:rPr>
+              <a:t>the</a:t>
+            </a:r>
+            <a:r>
+              <a:rPr lang="ms-MY" sz="1800" spc="-15" dirty="0">
+                <a:effectLst/>
+                <a:latin typeface="Times New Roman" panose="02020603050405020304" pitchFamily="18" charset="0"/>
+                <a:ea typeface="Times New Roman" panose="02020603050405020304" pitchFamily="18" charset="0"/>
+              </a:rPr>
+              <a:t> </a:t>
+            </a:r>
+            <a:r>
+              <a:rPr lang="ms-MY" sz="1800" spc="0" dirty="0">
+                <a:effectLst/>
+                <a:latin typeface="Times New Roman" panose="02020603050405020304" pitchFamily="18" charset="0"/>
+                <a:ea typeface="Times New Roman" panose="02020603050405020304" pitchFamily="18" charset="0"/>
+              </a:rPr>
+              <a:t>proton</a:t>
+            </a:r>
+            <a:r>
+              <a:rPr lang="ms-MY" sz="1800" spc="-15" dirty="0">
+                <a:effectLst/>
+                <a:latin typeface="Times New Roman" panose="02020603050405020304" pitchFamily="18" charset="0"/>
+                <a:ea typeface="Times New Roman" panose="02020603050405020304" pitchFamily="18" charset="0"/>
+              </a:rPr>
+              <a:t> </a:t>
+            </a:r>
+            <a:r>
+              <a:rPr lang="ms-MY" sz="1800" spc="0" dirty="0">
+                <a:effectLst/>
+                <a:latin typeface="Times New Roman" panose="02020603050405020304" pitchFamily="18" charset="0"/>
+                <a:ea typeface="Times New Roman" panose="02020603050405020304" pitchFamily="18" charset="0"/>
+              </a:rPr>
+              <a:t>due</a:t>
+            </a:r>
+            <a:r>
+              <a:rPr lang="ms-MY" sz="1800" spc="-15" dirty="0">
+                <a:effectLst/>
+                <a:latin typeface="Times New Roman" panose="02020603050405020304" pitchFamily="18" charset="0"/>
+                <a:ea typeface="Times New Roman" panose="02020603050405020304" pitchFamily="18" charset="0"/>
+              </a:rPr>
+              <a:t> </a:t>
+            </a:r>
+            <a:r>
+              <a:rPr lang="ms-MY" sz="1800" spc="0" dirty="0">
+                <a:effectLst/>
+                <a:latin typeface="Times New Roman" panose="02020603050405020304" pitchFamily="18" charset="0"/>
+                <a:ea typeface="Times New Roman" panose="02020603050405020304" pitchFamily="18" charset="0"/>
+              </a:rPr>
+              <a:t>to</a:t>
+            </a:r>
+            <a:r>
+              <a:rPr lang="ms-MY" sz="1800" spc="-30" dirty="0">
+                <a:effectLst/>
+                <a:latin typeface="Times New Roman" panose="02020603050405020304" pitchFamily="18" charset="0"/>
+                <a:ea typeface="Times New Roman" panose="02020603050405020304" pitchFamily="18" charset="0"/>
+              </a:rPr>
+              <a:t> </a:t>
+            </a:r>
+            <a:r>
+              <a:rPr lang="ms-MY" sz="1800" spc="0" dirty="0">
+                <a:effectLst/>
+                <a:latin typeface="Times New Roman" panose="02020603050405020304" pitchFamily="18" charset="0"/>
+                <a:ea typeface="Times New Roman" panose="02020603050405020304" pitchFamily="18" charset="0"/>
+              </a:rPr>
+              <a:t>electric</a:t>
+            </a:r>
+            <a:r>
+              <a:rPr lang="ms-MY" sz="1800" spc="-10" dirty="0">
+                <a:effectLst/>
+                <a:latin typeface="Times New Roman" panose="02020603050405020304" pitchFamily="18" charset="0"/>
+                <a:ea typeface="Times New Roman" panose="02020603050405020304" pitchFamily="18" charset="0"/>
+              </a:rPr>
+              <a:t> field.	</a:t>
+            </a:r>
+            <a:r>
+              <a:rPr lang="ms-MY" dirty="0">
+                <a:latin typeface="Times New Roman" panose="02020603050405020304" pitchFamily="18" charset="0"/>
+                <a:ea typeface="Times New Roman" panose="02020603050405020304" pitchFamily="18" charset="0"/>
+              </a:rPr>
+              <a:t>[3 </a:t>
+            </a:r>
+            <a:r>
+              <a:rPr lang="ms-MY" i="1" spc="-10" dirty="0">
+                <a:latin typeface="Times New Roman" panose="02020603050405020304" pitchFamily="18" charset="0"/>
+                <a:ea typeface="Times New Roman" panose="02020603050405020304" pitchFamily="18" charset="0"/>
+              </a:rPr>
+              <a:t>marks</a:t>
+            </a:r>
+            <a:r>
+              <a:rPr lang="ms-MY" spc="-10" dirty="0">
+                <a:latin typeface="Times New Roman" panose="02020603050405020304" pitchFamily="18" charset="0"/>
+                <a:ea typeface="Times New Roman" panose="02020603050405020304" pitchFamily="18" charset="0"/>
+              </a:rPr>
+              <a:t>]</a:t>
+            </a:r>
+            <a:endParaRPr lang="en-MY" sz="1800" spc="0" dirty="0">
+              <a:effectLst/>
+              <a:latin typeface="Times New Roman" panose="02020603050405020304" pitchFamily="18" charset="0"/>
+              <a:ea typeface="Times New Roman" panose="02020603050405020304" pitchFamily="18" charset="0"/>
+            </a:endParaRPr>
+          </a:p>
+          <a:p>
+            <a:pPr>
+              <a:spcBef>
+                <a:spcPts val="595"/>
+              </a:spcBef>
+              <a:buSzPts val="1100"/>
+              <a:tabLst>
+                <a:tab pos="950595" algn="l"/>
+              </a:tabLst>
+            </a:pPr>
+            <a:r>
+              <a:rPr lang="ms-MY" sz="1800" spc="0" dirty="0">
+                <a:effectLst/>
+                <a:latin typeface="Times New Roman" panose="02020603050405020304" pitchFamily="18" charset="0"/>
+                <a:ea typeface="Times New Roman" panose="02020603050405020304" pitchFamily="18" charset="0"/>
+              </a:rPr>
+              <a:t>(c)   potential</a:t>
+            </a:r>
+            <a:r>
+              <a:rPr lang="ms-MY" sz="1800" spc="-25" dirty="0">
+                <a:effectLst/>
+                <a:latin typeface="Times New Roman" panose="02020603050405020304" pitchFamily="18" charset="0"/>
+                <a:ea typeface="Times New Roman" panose="02020603050405020304" pitchFamily="18" charset="0"/>
+              </a:rPr>
+              <a:t> </a:t>
+            </a:r>
+            <a:r>
+              <a:rPr lang="ms-MY" sz="1800" spc="0" dirty="0">
+                <a:effectLst/>
+                <a:latin typeface="Times New Roman" panose="02020603050405020304" pitchFamily="18" charset="0"/>
+                <a:ea typeface="Times New Roman" panose="02020603050405020304" pitchFamily="18" charset="0"/>
+              </a:rPr>
+              <a:t>difference</a:t>
+            </a:r>
+            <a:r>
+              <a:rPr lang="ms-MY" sz="1800" spc="-25" dirty="0">
+                <a:effectLst/>
+                <a:latin typeface="Times New Roman" panose="02020603050405020304" pitchFamily="18" charset="0"/>
+                <a:ea typeface="Times New Roman" panose="02020603050405020304" pitchFamily="18" charset="0"/>
+              </a:rPr>
+              <a:t> </a:t>
+            </a:r>
+            <a:r>
+              <a:rPr lang="ms-MY" sz="1800" spc="0" dirty="0">
+                <a:effectLst/>
+                <a:latin typeface="Times New Roman" panose="02020603050405020304" pitchFamily="18" charset="0"/>
+                <a:ea typeface="Times New Roman" panose="02020603050405020304" pitchFamily="18" charset="0"/>
+              </a:rPr>
+              <a:t>between</a:t>
+            </a:r>
+            <a:r>
+              <a:rPr lang="ms-MY" sz="1800" spc="-25" dirty="0">
+                <a:effectLst/>
+                <a:latin typeface="Times New Roman" panose="02020603050405020304" pitchFamily="18" charset="0"/>
+                <a:ea typeface="Times New Roman" panose="02020603050405020304" pitchFamily="18" charset="0"/>
+              </a:rPr>
+              <a:t> </a:t>
+            </a:r>
+            <a:r>
+              <a:rPr lang="ms-MY" sz="1800" spc="0" dirty="0">
+                <a:effectLst/>
+                <a:latin typeface="Times New Roman" panose="02020603050405020304" pitchFamily="18" charset="0"/>
+                <a:ea typeface="Times New Roman" panose="02020603050405020304" pitchFamily="18" charset="0"/>
+              </a:rPr>
+              <a:t>the</a:t>
+            </a:r>
+            <a:r>
+              <a:rPr lang="ms-MY" sz="1800" spc="-25" dirty="0">
+                <a:effectLst/>
+                <a:latin typeface="Times New Roman" panose="02020603050405020304" pitchFamily="18" charset="0"/>
+                <a:ea typeface="Times New Roman" panose="02020603050405020304" pitchFamily="18" charset="0"/>
+              </a:rPr>
+              <a:t> </a:t>
+            </a:r>
+            <a:r>
+              <a:rPr lang="ms-MY" sz="1800" spc="0" dirty="0">
+                <a:effectLst/>
+                <a:latin typeface="Times New Roman" panose="02020603050405020304" pitchFamily="18" charset="0"/>
+                <a:ea typeface="Times New Roman" panose="02020603050405020304" pitchFamily="18" charset="0"/>
+              </a:rPr>
+              <a:t>parallel</a:t>
+            </a:r>
+            <a:r>
+              <a:rPr lang="ms-MY" sz="1800" spc="-25" dirty="0">
+                <a:effectLst/>
+                <a:latin typeface="Times New Roman" panose="02020603050405020304" pitchFamily="18" charset="0"/>
+                <a:ea typeface="Times New Roman" panose="02020603050405020304" pitchFamily="18" charset="0"/>
+              </a:rPr>
+              <a:t> </a:t>
+            </a:r>
+            <a:r>
+              <a:rPr lang="ms-MY" sz="1800" spc="-10" dirty="0">
+                <a:effectLst/>
+                <a:latin typeface="Times New Roman" panose="02020603050405020304" pitchFamily="18" charset="0"/>
+                <a:ea typeface="Times New Roman" panose="02020603050405020304" pitchFamily="18" charset="0"/>
+              </a:rPr>
+              <a:t>plates.	</a:t>
+            </a:r>
+            <a:r>
+              <a:rPr lang="ms-MY" dirty="0">
+                <a:latin typeface="Times New Roman" panose="02020603050405020304" pitchFamily="18" charset="0"/>
+                <a:ea typeface="Times New Roman" panose="02020603050405020304" pitchFamily="18" charset="0"/>
+              </a:rPr>
+              <a:t>[3 </a:t>
+            </a:r>
+            <a:r>
+              <a:rPr lang="ms-MY" i="1" spc="-10" dirty="0">
+                <a:latin typeface="Times New Roman" panose="02020603050405020304" pitchFamily="18" charset="0"/>
+                <a:ea typeface="Times New Roman" panose="02020603050405020304" pitchFamily="18" charset="0"/>
+              </a:rPr>
+              <a:t>marks</a:t>
+            </a:r>
+            <a:r>
+              <a:rPr lang="ms-MY" spc="-10" dirty="0">
+                <a:latin typeface="Times New Roman" panose="02020603050405020304" pitchFamily="18" charset="0"/>
+                <a:ea typeface="Times New Roman" panose="02020603050405020304" pitchFamily="18" charset="0"/>
+              </a:rPr>
+              <a:t>]</a:t>
+            </a:r>
+            <a:endParaRPr lang="en-MY" sz="1800" spc="0" dirty="0">
+              <a:effectLst/>
+              <a:latin typeface="Times New Roman" panose="02020603050405020304" pitchFamily="18" charset="0"/>
+              <a:ea typeface="Times New Roman" panose="02020603050405020304" pitchFamily="18" charset="0"/>
+            </a:endParaRPr>
+          </a:p>
+          <a:p>
+            <a:pPr>
+              <a:spcBef>
+                <a:spcPts val="605"/>
+              </a:spcBef>
+              <a:buSzPts val="1100"/>
+              <a:tabLst>
+                <a:tab pos="950595" algn="l"/>
+              </a:tabLst>
+            </a:pPr>
+            <a:r>
+              <a:rPr lang="ms-MY" sz="1800" spc="0" dirty="0">
+                <a:effectLst/>
+                <a:latin typeface="Times New Roman" panose="02020603050405020304" pitchFamily="18" charset="0"/>
+                <a:ea typeface="Times New Roman" panose="02020603050405020304" pitchFamily="18" charset="0"/>
+              </a:rPr>
+              <a:t>(d)   a</a:t>
+            </a:r>
+            <a:r>
+              <a:rPr lang="ms-MY" sz="1800" spc="-15" dirty="0">
+                <a:effectLst/>
+                <a:latin typeface="Times New Roman" panose="02020603050405020304" pitchFamily="18" charset="0"/>
+                <a:ea typeface="Times New Roman" panose="02020603050405020304" pitchFamily="18" charset="0"/>
+              </a:rPr>
+              <a:t> </a:t>
+            </a:r>
+            <a:r>
+              <a:rPr lang="ms-MY" sz="1800" spc="0" dirty="0">
+                <a:effectLst/>
+                <a:latin typeface="Times New Roman" panose="02020603050405020304" pitchFamily="18" charset="0"/>
+                <a:ea typeface="Times New Roman" panose="02020603050405020304" pitchFamily="18" charset="0"/>
+              </a:rPr>
+              <a:t>change</a:t>
+            </a:r>
+            <a:r>
+              <a:rPr lang="ms-MY" sz="1800" spc="-15" dirty="0">
+                <a:effectLst/>
+                <a:latin typeface="Times New Roman" panose="02020603050405020304" pitchFamily="18" charset="0"/>
+                <a:ea typeface="Times New Roman" panose="02020603050405020304" pitchFamily="18" charset="0"/>
+              </a:rPr>
+              <a:t> </a:t>
+            </a:r>
+            <a:r>
+              <a:rPr lang="ms-MY" sz="1800" spc="0" dirty="0">
+                <a:effectLst/>
+                <a:latin typeface="Times New Roman" panose="02020603050405020304" pitchFamily="18" charset="0"/>
+                <a:ea typeface="Times New Roman" panose="02020603050405020304" pitchFamily="18" charset="0"/>
+              </a:rPr>
+              <a:t>in</a:t>
+            </a:r>
+            <a:r>
+              <a:rPr lang="ms-MY" sz="1800" spc="-10" dirty="0">
+                <a:effectLst/>
+                <a:latin typeface="Times New Roman" panose="02020603050405020304" pitchFamily="18" charset="0"/>
+                <a:ea typeface="Times New Roman" panose="02020603050405020304" pitchFamily="18" charset="0"/>
+              </a:rPr>
+              <a:t> </a:t>
+            </a:r>
+            <a:r>
+              <a:rPr lang="ms-MY" sz="1800" spc="0" dirty="0">
+                <a:effectLst/>
+                <a:latin typeface="Times New Roman" panose="02020603050405020304" pitchFamily="18" charset="0"/>
+                <a:ea typeface="Times New Roman" panose="02020603050405020304" pitchFamily="18" charset="0"/>
+              </a:rPr>
+              <a:t>potential</a:t>
+            </a:r>
+            <a:r>
+              <a:rPr lang="ms-MY" sz="1800" spc="-10" dirty="0">
+                <a:effectLst/>
+                <a:latin typeface="Times New Roman" panose="02020603050405020304" pitchFamily="18" charset="0"/>
+                <a:ea typeface="Times New Roman" panose="02020603050405020304" pitchFamily="18" charset="0"/>
+              </a:rPr>
+              <a:t> </a:t>
+            </a:r>
+            <a:r>
+              <a:rPr lang="ms-MY" sz="1800" spc="0" dirty="0">
+                <a:effectLst/>
+                <a:latin typeface="Times New Roman" panose="02020603050405020304" pitchFamily="18" charset="0"/>
+                <a:ea typeface="Times New Roman" panose="02020603050405020304" pitchFamily="18" charset="0"/>
+              </a:rPr>
+              <a:t>energy</a:t>
+            </a:r>
+            <a:r>
+              <a:rPr lang="ms-MY" sz="1800" spc="-10" dirty="0">
+                <a:effectLst/>
+                <a:latin typeface="Times New Roman" panose="02020603050405020304" pitchFamily="18" charset="0"/>
+                <a:ea typeface="Times New Roman" panose="02020603050405020304" pitchFamily="18" charset="0"/>
+              </a:rPr>
+              <a:t> </a:t>
+            </a:r>
+            <a:r>
+              <a:rPr lang="ms-MY" sz="1800" spc="0" dirty="0">
+                <a:effectLst/>
+                <a:latin typeface="Times New Roman" panose="02020603050405020304" pitchFamily="18" charset="0"/>
+                <a:ea typeface="Times New Roman" panose="02020603050405020304" pitchFamily="18" charset="0"/>
+              </a:rPr>
+              <a:t>of</a:t>
+            </a:r>
+            <a:r>
+              <a:rPr lang="ms-MY" sz="1800" spc="-15" dirty="0">
+                <a:effectLst/>
+                <a:latin typeface="Times New Roman" panose="02020603050405020304" pitchFamily="18" charset="0"/>
+                <a:ea typeface="Times New Roman" panose="02020603050405020304" pitchFamily="18" charset="0"/>
+              </a:rPr>
+              <a:t> </a:t>
+            </a:r>
+            <a:r>
+              <a:rPr lang="ms-MY" sz="1800" spc="0" dirty="0">
+                <a:effectLst/>
+                <a:latin typeface="Times New Roman" panose="02020603050405020304" pitchFamily="18" charset="0"/>
+                <a:ea typeface="Times New Roman" panose="02020603050405020304" pitchFamily="18" charset="0"/>
+              </a:rPr>
+              <a:t>the</a:t>
+            </a:r>
+            <a:r>
+              <a:rPr lang="ms-MY" sz="1800" spc="-15" dirty="0">
+                <a:effectLst/>
+                <a:latin typeface="Times New Roman" panose="02020603050405020304" pitchFamily="18" charset="0"/>
+                <a:ea typeface="Times New Roman" panose="02020603050405020304" pitchFamily="18" charset="0"/>
+              </a:rPr>
+              <a:t> </a:t>
+            </a:r>
+            <a:r>
+              <a:rPr lang="ms-MY" sz="1800" spc="0" dirty="0">
+                <a:effectLst/>
+                <a:latin typeface="Times New Roman" panose="02020603050405020304" pitchFamily="18" charset="0"/>
+                <a:ea typeface="Times New Roman" panose="02020603050405020304" pitchFamily="18" charset="0"/>
+              </a:rPr>
+              <a:t>proton</a:t>
+            </a:r>
+            <a:r>
+              <a:rPr lang="ms-MY" sz="1800" spc="-10" dirty="0">
+                <a:effectLst/>
+                <a:latin typeface="Times New Roman" panose="02020603050405020304" pitchFamily="18" charset="0"/>
+                <a:ea typeface="Times New Roman" panose="02020603050405020304" pitchFamily="18" charset="0"/>
+              </a:rPr>
+              <a:t> </a:t>
+            </a:r>
+            <a:r>
+              <a:rPr lang="ms-MY" sz="1800" spc="0" dirty="0">
+                <a:effectLst/>
+                <a:latin typeface="Times New Roman" panose="02020603050405020304" pitchFamily="18" charset="0"/>
+                <a:ea typeface="Times New Roman" panose="02020603050405020304" pitchFamily="18" charset="0"/>
+              </a:rPr>
+              <a:t>when</a:t>
+            </a:r>
+            <a:r>
+              <a:rPr lang="ms-MY" sz="1800" spc="-25" dirty="0">
+                <a:effectLst/>
+                <a:latin typeface="Times New Roman" panose="02020603050405020304" pitchFamily="18" charset="0"/>
+                <a:ea typeface="Times New Roman" panose="02020603050405020304" pitchFamily="18" charset="0"/>
+              </a:rPr>
+              <a:t> </a:t>
+            </a:r>
+            <a:r>
+              <a:rPr lang="ms-MY" sz="1800" spc="0" dirty="0">
+                <a:effectLst/>
+                <a:latin typeface="Times New Roman" panose="02020603050405020304" pitchFamily="18" charset="0"/>
+                <a:ea typeface="Times New Roman" panose="02020603050405020304" pitchFamily="18" charset="0"/>
+              </a:rPr>
+              <a:t>it</a:t>
+            </a:r>
+            <a:r>
+              <a:rPr lang="ms-MY" sz="1800" spc="-5" dirty="0">
+                <a:effectLst/>
+                <a:latin typeface="Times New Roman" panose="02020603050405020304" pitchFamily="18" charset="0"/>
+                <a:ea typeface="Times New Roman" panose="02020603050405020304" pitchFamily="18" charset="0"/>
+              </a:rPr>
+              <a:t> </a:t>
+            </a:r>
+            <a:r>
+              <a:rPr lang="ms-MY" sz="1800" spc="0" dirty="0">
+                <a:effectLst/>
+                <a:latin typeface="Times New Roman" panose="02020603050405020304" pitchFamily="18" charset="0"/>
+                <a:ea typeface="Times New Roman" panose="02020603050405020304" pitchFamily="18" charset="0"/>
+              </a:rPr>
+              <a:t>reaches</a:t>
+            </a:r>
+            <a:r>
+              <a:rPr lang="ms-MY" sz="1800" spc="-15" dirty="0">
+                <a:effectLst/>
+                <a:latin typeface="Times New Roman" panose="02020603050405020304" pitchFamily="18" charset="0"/>
+                <a:ea typeface="Times New Roman" panose="02020603050405020304" pitchFamily="18" charset="0"/>
+              </a:rPr>
+              <a:t> </a:t>
+            </a:r>
+            <a:r>
+              <a:rPr lang="ms-MY" sz="1800" spc="0" dirty="0">
+                <a:effectLst/>
+                <a:latin typeface="Times New Roman" panose="02020603050405020304" pitchFamily="18" charset="0"/>
+                <a:ea typeface="Times New Roman" panose="02020603050405020304" pitchFamily="18" charset="0"/>
+              </a:rPr>
+              <a:t>negative</a:t>
+            </a:r>
+            <a:r>
+              <a:rPr lang="ms-MY" sz="1800" spc="-20" dirty="0">
+                <a:effectLst/>
+                <a:latin typeface="Times New Roman" panose="02020603050405020304" pitchFamily="18" charset="0"/>
+                <a:ea typeface="Times New Roman" panose="02020603050405020304" pitchFamily="18" charset="0"/>
+              </a:rPr>
+              <a:t> </a:t>
+            </a:r>
+            <a:r>
+              <a:rPr lang="ms-MY" sz="1800" spc="-10" dirty="0">
+                <a:effectLst/>
+                <a:latin typeface="Times New Roman" panose="02020603050405020304" pitchFamily="18" charset="0"/>
+                <a:ea typeface="Times New Roman" panose="02020603050405020304" pitchFamily="18" charset="0"/>
+              </a:rPr>
+              <a:t>plate.						</a:t>
+            </a:r>
+            <a:r>
+              <a:rPr lang="ms-MY" dirty="0">
+                <a:latin typeface="Times New Roman" panose="02020603050405020304" pitchFamily="18" charset="0"/>
+                <a:ea typeface="Times New Roman" panose="02020603050405020304" pitchFamily="18" charset="0"/>
+              </a:rPr>
+              <a:t>[3 </a:t>
+            </a:r>
+            <a:r>
+              <a:rPr lang="ms-MY" i="1" spc="-10" dirty="0">
+                <a:latin typeface="Times New Roman" panose="02020603050405020304" pitchFamily="18" charset="0"/>
+                <a:ea typeface="Times New Roman" panose="02020603050405020304" pitchFamily="18" charset="0"/>
+              </a:rPr>
+              <a:t>marks</a:t>
+            </a:r>
+            <a:r>
+              <a:rPr lang="ms-MY" spc="-10" dirty="0">
+                <a:latin typeface="Times New Roman" panose="02020603050405020304" pitchFamily="18" charset="0"/>
+                <a:ea typeface="Times New Roman" panose="02020603050405020304" pitchFamily="18" charset="0"/>
+              </a:rPr>
+              <a:t>]</a:t>
+            </a:r>
+            <a:endParaRPr lang="en-MY" sz="1800" spc="0" dirty="0">
+              <a:effectLst/>
+              <a:latin typeface="Times New Roman" panose="02020603050405020304" pitchFamily="18" charset="0"/>
+              <a:ea typeface="Times New Roman" panose="02020603050405020304" pitchFamily="18" charset="0"/>
+            </a:endParaRPr>
+          </a:p>
+          <a:p>
+            <a:pPr>
+              <a:buNone/>
+            </a:pPr>
+            <a:endParaRPr lang="en-MY" sz="1800" dirty="0">
+              <a:effectLst/>
+              <a:latin typeface="Times New Roman" panose="02020603050405020304" pitchFamily="18" charset="0"/>
+              <a:ea typeface="Times New Roman" panose="02020603050405020304" pitchFamily="18" charset="0"/>
+            </a:endParaRPr>
+          </a:p>
+        </p:txBody>
+      </p:sp>
+      <p:pic>
+        <p:nvPicPr>
+          <p:cNvPr id="15" name="Picture 14">
+            <a:extLst>
+              <a:ext uri="{FF2B5EF4-FFF2-40B4-BE49-F238E27FC236}">
+                <a16:creationId xmlns:a16="http://schemas.microsoft.com/office/drawing/2014/main" id="{B723FCAF-A4B2-BFF1-AF33-AD57955E6E79}"/>
+              </a:ext>
+            </a:extLst>
+          </p:cNvPr>
+          <p:cNvPicPr>
+            <a:picLocks noChangeAspect="1"/>
+          </p:cNvPicPr>
+          <p:nvPr/>
+        </p:nvPicPr>
+        <p:blipFill>
+          <a:blip r:embed="rId3"/>
+          <a:stretch>
+            <a:fillRect/>
+          </a:stretch>
+        </p:blipFill>
+        <p:spPr>
+          <a:xfrm>
+            <a:off x="9153029" y="5414113"/>
+            <a:ext cx="2705478" cy="1162212"/>
+          </a:xfrm>
+          <a:prstGeom prst="rect">
+            <a:avLst/>
+          </a:prstGeom>
+        </p:spPr>
+      </p:pic>
+    </p:spTree>
+    <p:extLst>
+      <p:ext uri="{BB962C8B-B14F-4D97-AF65-F5344CB8AC3E}">
+        <p14:creationId xmlns:p14="http://schemas.microsoft.com/office/powerpoint/2010/main" val="1075753854"/>
+      </p:ext>
+    </p:extLst>
+  </p:cSld>
+  <p:clrMapOvr>
+    <a:masterClrMapping/>
+  </p:clrMapOvr>
+</p:sld>
+</file>
+
+<file path=ppt/slides/slide5.xml><?xml version="1.0" encoding="utf-8"?>
+<p:sld xmlns:a="http://schemas.openxmlformats.org/drawingml/2006/main" xmlns:r="http://schemas.openxmlformats.org/officeDocument/2006/relationships" xmlns:p="http://schemas.openxmlformats.org/presentationml/2006/main">
+  <p:cSld>
+    <p:spTree>
+      <p:nvGrpSpPr>
+        <p:cNvPr id="1" name=""/>
+        <p:cNvGrpSpPr/>
+        <p:nvPr/>
+      </p:nvGrpSpPr>
+      <p:grpSpPr>
+        <a:xfrm>
+          <a:off x="0" y="0"/>
+          <a:ext cx="0" cy="0"/>
+          <a:chOff x="0" y="0"/>
+          <a:chExt cx="0" cy="0"/>
+        </a:xfrm>
+      </p:grpSpPr>
+      <p:sp>
+        <p:nvSpPr>
+          <p:cNvPr id="3" name="TextBox 2">
+            <a:extLst>
+              <a:ext uri="{FF2B5EF4-FFF2-40B4-BE49-F238E27FC236}">
+                <a16:creationId xmlns:a16="http://schemas.microsoft.com/office/drawing/2014/main" id="{35E8FC07-A1AB-D795-7DC8-93879CB94E93}"/>
+              </a:ext>
+            </a:extLst>
+          </p:cNvPr>
+          <p:cNvSpPr txBox="1"/>
+          <p:nvPr/>
+        </p:nvSpPr>
+        <p:spPr>
+          <a:xfrm>
+            <a:off x="4851348" y="542218"/>
+            <a:ext cx="6517459" cy="1200329"/>
+          </a:xfrm>
+          <a:prstGeom prst="rect">
+            <a:avLst/>
+          </a:prstGeom>
+          <a:noFill/>
+        </p:spPr>
+        <p:txBody>
+          <a:bodyPr wrap="square">
+            <a:spAutoFit/>
+          </a:bodyPr>
+          <a:lstStyle/>
+          <a:p>
+            <a:r>
+              <a:rPr lang="en-MY" sz="1800" b="1" dirty="0">
+                <a:effectLst/>
+                <a:latin typeface="Times New Roman" panose="02020603050405020304" pitchFamily="18" charset="0"/>
+                <a:ea typeface="Aptos" panose="020B0004020202020204" pitchFamily="34" charset="0"/>
+              </a:rPr>
+              <a:t>1</a:t>
+            </a:r>
+            <a:r>
+              <a:rPr lang="en-MY" sz="1800" dirty="0">
+                <a:effectLst/>
+                <a:latin typeface="Times New Roman" panose="02020603050405020304" pitchFamily="18" charset="0"/>
+                <a:ea typeface="Aptos" panose="020B0004020202020204" pitchFamily="34" charset="0"/>
+              </a:rPr>
+              <a:t>  (a) Three charges of magnitudes + 0.3 </a:t>
+            </a:r>
+            <a:r>
+              <a:rPr lang="en-MY" sz="1800" dirty="0" err="1">
+                <a:effectLst/>
+                <a:latin typeface="Times New Roman" panose="02020603050405020304" pitchFamily="18" charset="0"/>
+                <a:ea typeface="Aptos" panose="020B0004020202020204" pitchFamily="34" charset="0"/>
+              </a:rPr>
+              <a:t>μC</a:t>
+            </a:r>
+            <a:r>
+              <a:rPr lang="en-MY" sz="1800" dirty="0">
+                <a:effectLst/>
+                <a:latin typeface="Times New Roman" panose="02020603050405020304" pitchFamily="18" charset="0"/>
+                <a:ea typeface="Aptos" panose="020B0004020202020204" pitchFamily="34" charset="0"/>
+              </a:rPr>
+              <a:t>, + 0.6 </a:t>
+            </a:r>
+            <a:r>
+              <a:rPr lang="en-MY" sz="1800" dirty="0" err="1">
+                <a:effectLst/>
+                <a:latin typeface="Times New Roman" panose="02020603050405020304" pitchFamily="18" charset="0"/>
+                <a:ea typeface="Aptos" panose="020B0004020202020204" pitchFamily="34" charset="0"/>
+              </a:rPr>
+              <a:t>μC</a:t>
+            </a:r>
+            <a:r>
+              <a:rPr lang="en-MY" sz="1800" dirty="0">
+                <a:effectLst/>
+                <a:latin typeface="Times New Roman" panose="02020603050405020304" pitchFamily="18" charset="0"/>
+                <a:ea typeface="Aptos" panose="020B0004020202020204" pitchFamily="34" charset="0"/>
+              </a:rPr>
+              <a:t> and + 0.3 </a:t>
+            </a:r>
+            <a:r>
+              <a:rPr lang="en-MY" sz="1800" dirty="0" err="1">
+                <a:effectLst/>
+                <a:latin typeface="Times New Roman" panose="02020603050405020304" pitchFamily="18" charset="0"/>
+                <a:ea typeface="Aptos" panose="020B0004020202020204" pitchFamily="34" charset="0"/>
+              </a:rPr>
+              <a:t>μC</a:t>
+            </a:r>
+            <a:r>
+              <a:rPr lang="en-MY" sz="1800" dirty="0">
+                <a:effectLst/>
+                <a:latin typeface="Times New Roman" panose="02020603050405020304" pitchFamily="18" charset="0"/>
+                <a:ea typeface="Aptos" panose="020B0004020202020204" pitchFamily="34" charset="0"/>
+              </a:rPr>
+              <a:t> are placed on each corner of a left angled triangle with sides 6.0 cm, 8.0 cm and 10.0 cm respectively, as shown in </a:t>
+            </a:r>
+            <a:r>
+              <a:rPr lang="en-MY" sz="1800" b="1" dirty="0">
+                <a:effectLst/>
+                <a:latin typeface="Times New Roman" panose="02020603050405020304" pitchFamily="18" charset="0"/>
+                <a:ea typeface="Aptos" panose="020B0004020202020204" pitchFamily="34" charset="0"/>
+              </a:rPr>
+              <a:t>FIGURE 1</a:t>
+            </a:r>
+            <a:r>
+              <a:rPr lang="en-MY" sz="1800" dirty="0">
+                <a:effectLst/>
+                <a:latin typeface="Times New Roman" panose="02020603050405020304" pitchFamily="18" charset="0"/>
+                <a:ea typeface="Aptos" panose="020B0004020202020204" pitchFamily="34" charset="0"/>
+              </a:rPr>
+              <a:t>. Determine </a:t>
+            </a:r>
+            <a:endParaRPr lang="en-MY" dirty="0"/>
+          </a:p>
+        </p:txBody>
+      </p:sp>
+      <p:pic>
+        <p:nvPicPr>
+          <p:cNvPr id="4" name="Picture 3">
+            <a:extLst>
+              <a:ext uri="{FF2B5EF4-FFF2-40B4-BE49-F238E27FC236}">
+                <a16:creationId xmlns:a16="http://schemas.microsoft.com/office/drawing/2014/main" id="{1C66151A-6E0A-8EA5-8352-7A2DEBDBCD11}"/>
+              </a:ext>
+            </a:extLst>
+          </p:cNvPr>
+          <p:cNvPicPr>
+            <a:picLocks noChangeAspect="1"/>
+          </p:cNvPicPr>
+          <p:nvPr/>
+        </p:nvPicPr>
+        <p:blipFill>
+          <a:blip r:embed="rId3">
+            <a:extLst>
+              <a:ext uri="{28A0092B-C50C-407E-A947-70E740481C1C}">
+                <a14:useLocalDpi xmlns:a14="http://schemas.microsoft.com/office/drawing/2010/main" val="0"/>
+              </a:ext>
+            </a:extLst>
+          </a:blip>
+          <a:stretch>
+            <a:fillRect/>
+          </a:stretch>
+        </p:blipFill>
+        <p:spPr>
+          <a:xfrm>
+            <a:off x="330665" y="389204"/>
+            <a:ext cx="4106410" cy="1799360"/>
+          </a:xfrm>
+          <a:prstGeom prst="rect">
+            <a:avLst/>
+          </a:prstGeom>
+        </p:spPr>
+      </p:pic>
+      <p:sp>
+        <p:nvSpPr>
+          <p:cNvPr id="6" name="TextBox 5">
+            <a:extLst>
+              <a:ext uri="{FF2B5EF4-FFF2-40B4-BE49-F238E27FC236}">
+                <a16:creationId xmlns:a16="http://schemas.microsoft.com/office/drawing/2014/main" id="{FDFD88AB-3A2D-15ED-28FC-8867246DC643}"/>
+              </a:ext>
+            </a:extLst>
+          </p:cNvPr>
+          <p:cNvSpPr txBox="1"/>
+          <p:nvPr/>
+        </p:nvSpPr>
+        <p:spPr>
+          <a:xfrm>
+            <a:off x="4851348" y="1742547"/>
+            <a:ext cx="6626420" cy="923330"/>
+          </a:xfrm>
+          <a:prstGeom prst="rect">
+            <a:avLst/>
+          </a:prstGeom>
+          <a:noFill/>
+        </p:spPr>
+        <p:txBody>
+          <a:bodyPr wrap="square">
+            <a:spAutoFit/>
+          </a:bodyPr>
+          <a:lstStyle/>
+          <a:p>
+            <a:pPr>
+              <a:buNone/>
+            </a:pPr>
+            <a:r>
+              <a:rPr lang="en-MY" sz="1800" dirty="0">
+                <a:solidFill>
+                  <a:srgbClr val="000000"/>
+                </a:solidFill>
+                <a:effectLst/>
+                <a:latin typeface="Times New Roman" panose="02020603050405020304" pitchFamily="18" charset="0"/>
+                <a:ea typeface="Aptos" panose="020B0004020202020204" pitchFamily="34" charset="0"/>
+              </a:rPr>
+              <a:t>(</a:t>
+            </a:r>
+            <a:r>
+              <a:rPr lang="en-MY" sz="1800" dirty="0" err="1">
+                <a:solidFill>
+                  <a:srgbClr val="000000"/>
+                </a:solidFill>
+                <a:effectLst/>
+                <a:latin typeface="Times New Roman" panose="02020603050405020304" pitchFamily="18" charset="0"/>
+                <a:ea typeface="Aptos" panose="020B0004020202020204" pitchFamily="34" charset="0"/>
+              </a:rPr>
+              <a:t>i</a:t>
+            </a:r>
+            <a:r>
+              <a:rPr lang="en-MY" sz="1800" dirty="0">
+                <a:solidFill>
+                  <a:srgbClr val="000000"/>
+                </a:solidFill>
+                <a:effectLst/>
+                <a:latin typeface="Times New Roman" panose="02020603050405020304" pitchFamily="18" charset="0"/>
+                <a:ea typeface="Aptos" panose="020B0004020202020204" pitchFamily="34" charset="0"/>
+              </a:rPr>
+              <a:t>) the electric field at charge + 0.6 </a:t>
+            </a:r>
+            <a:r>
+              <a:rPr lang="en-MY" sz="1800" dirty="0" err="1">
+                <a:solidFill>
+                  <a:srgbClr val="000000"/>
+                </a:solidFill>
+                <a:effectLst/>
+                <a:latin typeface="Times New Roman" panose="02020603050405020304" pitchFamily="18" charset="0"/>
+                <a:ea typeface="Aptos" panose="020B0004020202020204" pitchFamily="34" charset="0"/>
+              </a:rPr>
+              <a:t>μC</a:t>
+            </a:r>
+            <a:r>
+              <a:rPr lang="en-MY" sz="1800" dirty="0">
+                <a:solidFill>
+                  <a:srgbClr val="000000"/>
+                </a:solidFill>
+                <a:effectLst/>
+                <a:latin typeface="Times New Roman" panose="02020603050405020304" pitchFamily="18" charset="0"/>
+                <a:ea typeface="Aptos" panose="020B0004020202020204" pitchFamily="34" charset="0"/>
+              </a:rPr>
+              <a:t>. </a:t>
+            </a:r>
+            <a:endParaRPr lang="en-MY" sz="2000" dirty="0">
+              <a:solidFill>
+                <a:srgbClr val="000000"/>
+              </a:solidFill>
+              <a:effectLst/>
+              <a:latin typeface="Times New Roman" panose="02020603050405020304" pitchFamily="18" charset="0"/>
+              <a:ea typeface="Aptos" panose="020B0004020202020204" pitchFamily="34" charset="0"/>
+            </a:endParaRPr>
+          </a:p>
+          <a:p>
+            <a:pPr>
+              <a:buNone/>
+            </a:pPr>
+            <a:r>
+              <a:rPr lang="en-MY" sz="1800" dirty="0">
+                <a:solidFill>
+                  <a:srgbClr val="000000"/>
+                </a:solidFill>
+                <a:effectLst/>
+                <a:latin typeface="Times New Roman" panose="02020603050405020304" pitchFamily="18" charset="0"/>
+                <a:ea typeface="Aptos" panose="020B0004020202020204" pitchFamily="34" charset="0"/>
+              </a:rPr>
+              <a:t>(ii) the force experienced by the charge + 0.6 </a:t>
+            </a:r>
+            <a:r>
+              <a:rPr lang="en-MY" sz="1800" dirty="0" err="1">
+                <a:solidFill>
+                  <a:srgbClr val="000000"/>
+                </a:solidFill>
+                <a:effectLst/>
+                <a:latin typeface="Times New Roman" panose="02020603050405020304" pitchFamily="18" charset="0"/>
+                <a:ea typeface="Aptos" panose="020B0004020202020204" pitchFamily="34" charset="0"/>
+              </a:rPr>
+              <a:t>μC</a:t>
+            </a:r>
+            <a:r>
+              <a:rPr lang="en-MY" sz="1800" dirty="0">
+                <a:solidFill>
+                  <a:srgbClr val="000000"/>
+                </a:solidFill>
+                <a:effectLst/>
+                <a:latin typeface="Times New Roman" panose="02020603050405020304" pitchFamily="18" charset="0"/>
+                <a:ea typeface="Aptos" panose="020B0004020202020204" pitchFamily="34" charset="0"/>
+              </a:rPr>
+              <a:t>. 									[7 </a:t>
+            </a:r>
+            <a:r>
+              <a:rPr lang="en-MY" sz="1800" i="1" dirty="0">
+                <a:solidFill>
+                  <a:srgbClr val="000000"/>
+                </a:solidFill>
+                <a:effectLst/>
+                <a:latin typeface="Times New Roman" panose="02020603050405020304" pitchFamily="18" charset="0"/>
+                <a:ea typeface="Aptos" panose="020B0004020202020204" pitchFamily="34" charset="0"/>
+              </a:rPr>
+              <a:t>marks</a:t>
+            </a:r>
+            <a:r>
+              <a:rPr lang="en-MY" sz="1800" dirty="0">
+                <a:solidFill>
+                  <a:srgbClr val="000000"/>
+                </a:solidFill>
+                <a:effectLst/>
+                <a:latin typeface="Times New Roman" panose="02020603050405020304" pitchFamily="18" charset="0"/>
+                <a:ea typeface="Aptos" panose="020B0004020202020204" pitchFamily="34" charset="0"/>
+              </a:rPr>
+              <a:t>] </a:t>
+            </a:r>
+            <a:endParaRPr lang="en-MY" sz="2000" dirty="0">
+              <a:solidFill>
+                <a:srgbClr val="000000"/>
+              </a:solidFill>
+              <a:effectLst/>
+              <a:latin typeface="Times New Roman" panose="02020603050405020304" pitchFamily="18" charset="0"/>
+              <a:ea typeface="Aptos" panose="020B0004020202020204" pitchFamily="34" charset="0"/>
+            </a:endParaRPr>
+          </a:p>
+        </p:txBody>
+      </p:sp>
+      <p:sp>
+        <p:nvSpPr>
+          <p:cNvPr id="8" name="TextBox 7">
+            <a:extLst>
+              <a:ext uri="{FF2B5EF4-FFF2-40B4-BE49-F238E27FC236}">
+                <a16:creationId xmlns:a16="http://schemas.microsoft.com/office/drawing/2014/main" id="{B740549D-D469-E91B-57A0-8BC7E8CDAC8F}"/>
+              </a:ext>
+            </a:extLst>
+          </p:cNvPr>
+          <p:cNvSpPr txBox="1"/>
+          <p:nvPr/>
+        </p:nvSpPr>
+        <p:spPr>
+          <a:xfrm>
+            <a:off x="890516" y="2746655"/>
+            <a:ext cx="10955741" cy="923330"/>
+          </a:xfrm>
+          <a:prstGeom prst="rect">
+            <a:avLst/>
+          </a:prstGeom>
+          <a:noFill/>
+        </p:spPr>
+        <p:txBody>
+          <a:bodyPr wrap="square">
+            <a:spAutoFit/>
+          </a:bodyPr>
+          <a:lstStyle/>
+          <a:p>
+            <a:pPr>
+              <a:buNone/>
+            </a:pPr>
+            <a:r>
+              <a:rPr lang="en-MY" sz="1800" dirty="0">
+                <a:solidFill>
+                  <a:srgbClr val="000000"/>
+                </a:solidFill>
+                <a:effectLst/>
+                <a:latin typeface="Times New Roman" panose="02020603050405020304" pitchFamily="18" charset="0"/>
+                <a:ea typeface="Aptos" panose="020B0004020202020204" pitchFamily="34" charset="0"/>
+              </a:rPr>
+              <a:t>(b) An isolated charge, </a:t>
+            </a:r>
+            <a:r>
+              <a:rPr lang="en-MY" sz="1800" i="1" dirty="0">
+                <a:solidFill>
+                  <a:srgbClr val="000000"/>
+                </a:solidFill>
+                <a:effectLst/>
+                <a:latin typeface="Times New Roman" panose="02020603050405020304" pitchFamily="18" charset="0"/>
+                <a:ea typeface="Aptos" panose="020B0004020202020204" pitchFamily="34" charset="0"/>
+              </a:rPr>
+              <a:t>Q </a:t>
+            </a:r>
+            <a:r>
+              <a:rPr lang="en-MY" sz="1800" dirty="0">
+                <a:solidFill>
+                  <a:srgbClr val="000000"/>
+                </a:solidFill>
+                <a:effectLst/>
+                <a:latin typeface="Times New Roman" panose="02020603050405020304" pitchFamily="18" charset="0"/>
+                <a:ea typeface="Aptos" panose="020B0004020202020204" pitchFamily="34" charset="0"/>
+              </a:rPr>
+              <a:t>of 5 x 10</a:t>
+            </a:r>
+            <a:r>
+              <a:rPr lang="en-MY" sz="1800" baseline="30000" dirty="0">
+                <a:solidFill>
+                  <a:srgbClr val="000000"/>
+                </a:solidFill>
+                <a:effectLst/>
+                <a:latin typeface="Times New Roman" panose="02020603050405020304" pitchFamily="18" charset="0"/>
+                <a:ea typeface="Aptos" panose="020B0004020202020204" pitchFamily="34" charset="0"/>
+              </a:rPr>
+              <a:t>-6</a:t>
+            </a:r>
+            <a:r>
+              <a:rPr lang="en-MY" sz="1800" dirty="0">
+                <a:solidFill>
+                  <a:srgbClr val="000000"/>
+                </a:solidFill>
+                <a:effectLst/>
+                <a:latin typeface="Times New Roman" panose="02020603050405020304" pitchFamily="18" charset="0"/>
+                <a:ea typeface="Aptos" panose="020B0004020202020204" pitchFamily="34" charset="0"/>
+              </a:rPr>
+              <a:t>C is placed in a region and it creates an electric field around it. Calculate the work done to move a test charge </a:t>
+            </a:r>
+            <a:r>
+              <a:rPr lang="en-MY" sz="1800" i="1" dirty="0">
+                <a:solidFill>
+                  <a:srgbClr val="000000"/>
+                </a:solidFill>
+                <a:effectLst/>
+                <a:latin typeface="Times New Roman" panose="02020603050405020304" pitchFamily="18" charset="0"/>
+                <a:ea typeface="Aptos" panose="020B0004020202020204" pitchFamily="34" charset="0"/>
+              </a:rPr>
+              <a:t>q </a:t>
+            </a:r>
+            <a:r>
+              <a:rPr lang="en-MY" sz="1800" dirty="0">
+                <a:solidFill>
+                  <a:srgbClr val="000000"/>
+                </a:solidFill>
+                <a:effectLst/>
+                <a:latin typeface="Times New Roman" panose="02020603050405020304" pitchFamily="18" charset="0"/>
+                <a:ea typeface="Aptos" panose="020B0004020202020204" pitchFamily="34" charset="0"/>
+              </a:rPr>
+              <a:t>of 2 x 10</a:t>
+            </a:r>
+            <a:r>
+              <a:rPr lang="en-MY" sz="1800" baseline="30000" dirty="0">
+                <a:solidFill>
+                  <a:srgbClr val="000000"/>
+                </a:solidFill>
+                <a:effectLst/>
+                <a:latin typeface="Times New Roman" panose="02020603050405020304" pitchFamily="18" charset="0"/>
+                <a:ea typeface="Aptos" panose="020B0004020202020204" pitchFamily="34" charset="0"/>
+              </a:rPr>
+              <a:t>-7</a:t>
+            </a:r>
+            <a:r>
+              <a:rPr lang="en-MY" sz="1800" dirty="0">
+                <a:solidFill>
+                  <a:srgbClr val="000000"/>
+                </a:solidFill>
+                <a:effectLst/>
+                <a:latin typeface="Times New Roman" panose="02020603050405020304" pitchFamily="18" charset="0"/>
+                <a:ea typeface="Aptos" panose="020B0004020202020204" pitchFamily="34" charset="0"/>
+              </a:rPr>
+              <a:t>C from point S to point P, which are located at 60 cm and 30 cm respectively from charge </a:t>
+            </a:r>
+            <a:r>
+              <a:rPr lang="en-MY" sz="1800" i="1" dirty="0">
+                <a:solidFill>
+                  <a:srgbClr val="000000"/>
+                </a:solidFill>
+                <a:effectLst/>
+                <a:latin typeface="Times New Roman" panose="02020603050405020304" pitchFamily="18" charset="0"/>
+                <a:ea typeface="Aptos" panose="020B0004020202020204" pitchFamily="34" charset="0"/>
+              </a:rPr>
+              <a:t>Q</a:t>
+            </a:r>
+            <a:r>
+              <a:rPr lang="en-MY" sz="1800" dirty="0">
+                <a:solidFill>
+                  <a:srgbClr val="000000"/>
+                </a:solidFill>
+                <a:effectLst/>
+                <a:latin typeface="Times New Roman" panose="02020603050405020304" pitchFamily="18" charset="0"/>
+                <a:ea typeface="Aptos" panose="020B0004020202020204" pitchFamily="34" charset="0"/>
+              </a:rPr>
+              <a:t>. 								[3 </a:t>
+            </a:r>
+            <a:r>
+              <a:rPr lang="en-MY" sz="1800" i="1" dirty="0">
+                <a:solidFill>
+                  <a:srgbClr val="000000"/>
+                </a:solidFill>
+                <a:effectLst/>
+                <a:latin typeface="Times New Roman" panose="02020603050405020304" pitchFamily="18" charset="0"/>
+                <a:ea typeface="Aptos" panose="020B0004020202020204" pitchFamily="34" charset="0"/>
+              </a:rPr>
+              <a:t>marks</a:t>
+            </a:r>
+            <a:r>
+              <a:rPr lang="en-MY" sz="1800" dirty="0">
+                <a:solidFill>
+                  <a:srgbClr val="000000"/>
+                </a:solidFill>
+                <a:effectLst/>
+                <a:latin typeface="Times New Roman" panose="02020603050405020304" pitchFamily="18" charset="0"/>
+                <a:ea typeface="Aptos" panose="020B0004020202020204" pitchFamily="34" charset="0"/>
+              </a:rPr>
+              <a:t>]</a:t>
+            </a:r>
+            <a:endParaRPr lang="en-MY" sz="2000" dirty="0">
+              <a:solidFill>
+                <a:srgbClr val="000000"/>
+              </a:solidFill>
+              <a:effectLst/>
+              <a:latin typeface="Times New Roman" panose="02020603050405020304" pitchFamily="18" charset="0"/>
+              <a:ea typeface="Aptos" panose="020B0004020202020204" pitchFamily="34" charset="0"/>
+            </a:endParaRPr>
+          </a:p>
+        </p:txBody>
+      </p:sp>
+      <p:pic>
+        <p:nvPicPr>
+          <p:cNvPr id="14" name="Picture 13">
+            <a:extLst>
+              <a:ext uri="{FF2B5EF4-FFF2-40B4-BE49-F238E27FC236}">
+                <a16:creationId xmlns:a16="http://schemas.microsoft.com/office/drawing/2014/main" id="{AE2D3F79-5469-2EF0-37B1-202EE9D259F6}"/>
+              </a:ext>
+            </a:extLst>
+          </p:cNvPr>
+          <p:cNvPicPr>
+            <a:picLocks noChangeAspect="1"/>
+          </p:cNvPicPr>
+          <p:nvPr/>
+        </p:nvPicPr>
+        <p:blipFill>
+          <a:blip r:embed="rId4"/>
+          <a:stretch>
+            <a:fillRect/>
+          </a:stretch>
+        </p:blipFill>
+        <p:spPr>
+          <a:xfrm>
+            <a:off x="8937145" y="5745475"/>
+            <a:ext cx="2772162" cy="733527"/>
+          </a:xfrm>
+          <a:prstGeom prst="rect">
+            <a:avLst/>
+          </a:prstGeom>
+        </p:spPr>
+      </p:pic>
+    </p:spTree>
+    <p:extLst>
+      <p:ext uri="{BB962C8B-B14F-4D97-AF65-F5344CB8AC3E}">
+        <p14:creationId xmlns:p14="http://schemas.microsoft.com/office/powerpoint/2010/main" val="4202112223"/>
+      </p:ext>
+    </p:extLst>
+  </p:cSld>
+  <p:clrMapOvr>
+    <a:masterClrMapping/>
+  </p:clrMapOvr>
+</p:sld>
+</file>
+
+<file path=ppt/slides/slide6.xml><?xml version="1.0" encoding="utf-8"?>
+<p:sld xmlns:a="http://schemas.openxmlformats.org/drawingml/2006/main" xmlns:r="http://schemas.openxmlformats.org/officeDocument/2006/relationships" xmlns:p="http://schemas.openxmlformats.org/presentationml/2006/main">
+  <p:cSld>
+    <p:spTree>
+      <p:nvGrpSpPr>
+        <p:cNvPr id="1" name=""/>
+        <p:cNvGrpSpPr/>
+        <p:nvPr/>
+      </p:nvGrpSpPr>
+      <p:grpSpPr>
+        <a:xfrm>
+          <a:off x="0" y="0"/>
+          <a:ext cx="0" cy="0"/>
+          <a:chOff x="0" y="0"/>
+          <a:chExt cx="0" cy="0"/>
+        </a:xfrm>
+      </p:grpSpPr>
+      <p:sp>
+        <p:nvSpPr>
+          <p:cNvPr id="8" name="Rectangle 5">
+            <a:extLst>
+              <a:ext uri="{FF2B5EF4-FFF2-40B4-BE49-F238E27FC236}">
+                <a16:creationId xmlns:a16="http://schemas.microsoft.com/office/drawing/2014/main" id="{8FF6CA19-DA51-C281-A761-8D25156D41F1}"/>
+              </a:ext>
+            </a:extLst>
+          </p:cNvPr>
+          <p:cNvSpPr>
+            <a:spLocks noChangeArrowheads="1"/>
+          </p:cNvSpPr>
+          <p:nvPr/>
+        </p:nvSpPr>
+        <p:spPr bwMode="auto">
+          <a:xfrm>
+            <a:off x="899652" y="383855"/>
+            <a:ext cx="9692640" cy="2011105"/>
+          </a:xfrm>
+          <a:prstGeom prst="rect">
+            <a:avLst/>
+          </a:prstGeom>
+          <a:noFill/>
+          <a:ln>
+            <a:noFill/>
+          </a:ln>
+          <a:effectLst/>
+          <a:extLst>
+            <a:ext uri="{909E8E84-426E-40DD-AFC4-6F175D3DCCD1}">
+              <a14:hiddenFill xmlns:a14="http://schemas.microsoft.com/office/drawing/2010/main">
+                <a:solidFill>
+                  <a:schemeClr val="accent1"/>
+                </a:solidFill>
+              </a14:hiddenFill>
+            </a:ext>
+            <a:ext uri="{91240B29-F687-4F45-9708-019B960494DF}">
+              <a14:hiddenLine xmlns:a14="http://schemas.microsoft.com/office/drawing/2010/main" w="9525">
+                <a:solidFill>
+                  <a:schemeClr val="tx1"/>
+                </a:solidFill>
+                <a:miter lim="800000"/>
+                <a:headEnd/>
+                <a:tailEnd/>
+              </a14:hiddenLine>
+            </a:ext>
+            <a:ext uri="{AF507438-7753-43E0-B8FC-AC1667EBCBE1}">
+              <a14:hiddenEffects xmlns:a14="http://schemas.microsoft.com/office/drawing/2010/main">
+                <a:effectLst>
+                  <a:outerShdw dist="35921" dir="2700000" algn="ctr" rotWithShape="0">
+                    <a:schemeClr val="bg2"/>
+                  </a:outerShdw>
+                </a:effectLst>
+              </a14:hiddenEffects>
+            </a:ext>
+          </a:extLst>
+        </p:spPr>
+        <p:txBody>
+          <a:bodyPr vert="horz" wrap="square" lIns="0" tIns="0" rIns="0" bIns="71415" numCol="1" anchor="ctr" anchorCtr="0" compatLnSpc="1">
+            <a:prstTxWarp prst="textNoShape">
+              <a:avLst/>
+            </a:prstTxWarp>
+            <a:spAutoFit/>
+          </a:bodyPr>
+          <a:lstStyle/>
+          <a:p>
+            <a:pPr marL="0" marR="0" lvl="0" indent="0" algn="l" defTabSz="914400" rtl="0" eaLnBrk="0" fontAlgn="base" latinLnBrk="0" hangingPunct="0">
+              <a:lnSpc>
+                <a:spcPct val="100000"/>
+              </a:lnSpc>
+              <a:spcBef>
+                <a:spcPct val="0"/>
+              </a:spcBef>
+              <a:spcAft>
+                <a:spcPct val="0"/>
+              </a:spcAft>
+              <a:buClrTx/>
+              <a:buSzTx/>
+              <a:buFontTx/>
+              <a:buAutoNum type="arabicPeriod"/>
+              <a:tabLst/>
+            </a:pPr>
+            <a:r>
+              <a:rPr kumimoji="0" lang="en-US" altLang="en-US" b="0" i="0" u="none" strike="noStrike" cap="none" normalizeH="0" baseline="0" dirty="0">
+                <a:ln>
+                  <a:noFill/>
+                </a:ln>
+                <a:solidFill>
+                  <a:srgbClr val="1F1F1F"/>
+                </a:solidFill>
+                <a:effectLst/>
+                <a:latin typeface="Google Sans Text"/>
+              </a:rPr>
+              <a:t>(a) Two point charges, q₁ and q₂ are located on the y-axis. Charge q₁ = +2.3 µC is placed at y = -0.56 m and charge q₂ = -5.3 µC is located at y = +0.37 m.</a:t>
+            </a:r>
+          </a:p>
+          <a:p>
+            <a:pPr marL="0" marR="0" lvl="0" indent="0" algn="l" defTabSz="914400" rtl="0" eaLnBrk="0" fontAlgn="base" latinLnBrk="0" hangingPunct="0">
+              <a:lnSpc>
+                <a:spcPct val="100000"/>
+              </a:lnSpc>
+              <a:spcBef>
+                <a:spcPct val="0"/>
+              </a:spcBef>
+              <a:spcAft>
+                <a:spcPct val="0"/>
+              </a:spcAft>
+              <a:buClrTx/>
+              <a:buSzTx/>
+              <a:buFontTx/>
+              <a:buNone/>
+              <a:tabLst/>
+            </a:pPr>
+            <a:r>
+              <a:rPr kumimoji="0" lang="en-US" altLang="en-US" b="0" i="0" u="none" strike="noStrike" cap="none" normalizeH="0" baseline="0" dirty="0">
+                <a:ln>
+                  <a:noFill/>
+                </a:ln>
+                <a:solidFill>
+                  <a:srgbClr val="1F1F1F"/>
+                </a:solidFill>
+                <a:effectLst/>
+                <a:latin typeface="Google Sans Text"/>
+              </a:rPr>
+              <a:t>(</a:t>
+            </a:r>
+            <a:r>
+              <a:rPr kumimoji="0" lang="en-US" altLang="en-US" b="0" i="0" u="none" strike="noStrike" cap="none" normalizeH="0" baseline="0" dirty="0" err="1">
+                <a:ln>
+                  <a:noFill/>
+                </a:ln>
+                <a:solidFill>
+                  <a:srgbClr val="1F1F1F"/>
+                </a:solidFill>
+                <a:effectLst/>
+                <a:latin typeface="Google Sans Text"/>
+              </a:rPr>
+              <a:t>i</a:t>
+            </a:r>
+            <a:r>
+              <a:rPr kumimoji="0" lang="en-US" altLang="en-US" b="0" i="0" u="none" strike="noStrike" cap="none" normalizeH="0" baseline="0" dirty="0">
+                <a:ln>
+                  <a:noFill/>
+                </a:ln>
+                <a:solidFill>
+                  <a:srgbClr val="1F1F1F"/>
+                </a:solidFill>
+                <a:effectLst/>
+                <a:latin typeface="Google Sans Text"/>
+              </a:rPr>
+              <a:t>) Calculate the magnitude and direction of the net electric field at the origin due to these two point charges.</a:t>
+            </a:r>
+          </a:p>
+          <a:p>
+            <a:pPr marL="0" marR="0" lvl="0" indent="0" algn="l" defTabSz="914400" rtl="0" eaLnBrk="0" fontAlgn="base" latinLnBrk="0" hangingPunct="0">
+              <a:lnSpc>
+                <a:spcPct val="100000"/>
+              </a:lnSpc>
+              <a:spcBef>
+                <a:spcPct val="0"/>
+              </a:spcBef>
+              <a:spcAft>
+                <a:spcPct val="0"/>
+              </a:spcAft>
+              <a:buClrTx/>
+              <a:buSzTx/>
+              <a:buFontTx/>
+              <a:buNone/>
+              <a:tabLst/>
+            </a:pPr>
+            <a:r>
+              <a:rPr kumimoji="0" lang="en-US" altLang="en-US" b="0" i="0" u="none" strike="noStrike" cap="none" normalizeH="0" baseline="0" dirty="0">
+                <a:ln>
+                  <a:noFill/>
+                </a:ln>
+                <a:solidFill>
+                  <a:srgbClr val="1F1F1F"/>
+                </a:solidFill>
+                <a:effectLst/>
+                <a:latin typeface="Google Sans Text"/>
+              </a:rPr>
+              <a:t>(ii) Determine the magnitude and direction of the electric force exerted on a third charge, q₃ = -3.8 µC placed at the origin.</a:t>
+            </a:r>
+          </a:p>
+          <a:p>
+            <a:pPr marL="0" marR="0" lvl="0" indent="0" algn="r" defTabSz="914400" rtl="0" eaLnBrk="0" fontAlgn="base" latinLnBrk="0" hangingPunct="0">
+              <a:lnSpc>
+                <a:spcPct val="100000"/>
+              </a:lnSpc>
+              <a:spcBef>
+                <a:spcPct val="0"/>
+              </a:spcBef>
+              <a:spcAft>
+                <a:spcPct val="0"/>
+              </a:spcAft>
+              <a:buClrTx/>
+              <a:buSzTx/>
+              <a:buFontTx/>
+              <a:buNone/>
+              <a:tabLst/>
+            </a:pPr>
+            <a:r>
+              <a:rPr kumimoji="0" lang="en-US" altLang="en-US" b="0" i="0" u="none" strike="noStrike" cap="none" normalizeH="0" baseline="0" dirty="0">
+                <a:ln>
+                  <a:noFill/>
+                </a:ln>
+                <a:solidFill>
+                  <a:srgbClr val="1F1F1F"/>
+                </a:solidFill>
+                <a:effectLst/>
+                <a:latin typeface="Google Sans Text"/>
+              </a:rPr>
+              <a:t>[6 marks]</a:t>
+            </a:r>
+          </a:p>
+        </p:txBody>
+      </p:sp>
+      <p:pic>
+        <p:nvPicPr>
+          <p:cNvPr id="12" name="Picture 11">
+            <a:extLst>
+              <a:ext uri="{FF2B5EF4-FFF2-40B4-BE49-F238E27FC236}">
+                <a16:creationId xmlns:a16="http://schemas.microsoft.com/office/drawing/2014/main" id="{B9F60EEB-5618-FBEF-12B9-ECE7E0F7D38E}"/>
+              </a:ext>
+            </a:extLst>
+          </p:cNvPr>
+          <p:cNvPicPr>
+            <a:picLocks noChangeAspect="1"/>
+          </p:cNvPicPr>
+          <p:nvPr/>
+        </p:nvPicPr>
+        <p:blipFill>
+          <a:blip r:embed="rId2"/>
+          <a:stretch>
+            <a:fillRect/>
+          </a:stretch>
+        </p:blipFill>
+        <p:spPr>
+          <a:xfrm>
+            <a:off x="191729" y="2500516"/>
+            <a:ext cx="3285201" cy="4179453"/>
+          </a:xfrm>
+          <a:prstGeom prst="rect">
+            <a:avLst/>
+          </a:prstGeom>
+        </p:spPr>
+      </p:pic>
+      <p:sp>
+        <p:nvSpPr>
+          <p:cNvPr id="14" name="TextBox 13">
+            <a:extLst>
+              <a:ext uri="{FF2B5EF4-FFF2-40B4-BE49-F238E27FC236}">
+                <a16:creationId xmlns:a16="http://schemas.microsoft.com/office/drawing/2014/main" id="{4DBE2D63-90C1-A882-1CA6-65314A8B01EE}"/>
+              </a:ext>
+            </a:extLst>
+          </p:cNvPr>
+          <p:cNvSpPr txBox="1"/>
+          <p:nvPr/>
+        </p:nvSpPr>
+        <p:spPr>
+          <a:xfrm>
+            <a:off x="3476930" y="2566098"/>
+            <a:ext cx="7304140" cy="2308324"/>
+          </a:xfrm>
+          <a:prstGeom prst="rect">
+            <a:avLst/>
+          </a:prstGeom>
+          <a:noFill/>
+        </p:spPr>
+        <p:txBody>
+          <a:bodyPr wrap="square">
+            <a:spAutoFit/>
+          </a:bodyPr>
+          <a:lstStyle/>
+          <a:p>
+            <a:pPr marL="0" marR="0" lvl="0" indent="0" algn="l" defTabSz="914400" rtl="0" eaLnBrk="0" fontAlgn="base" latinLnBrk="0" hangingPunct="0">
+              <a:lnSpc>
+                <a:spcPct val="100000"/>
+              </a:lnSpc>
+              <a:spcBef>
+                <a:spcPct val="0"/>
+              </a:spcBef>
+              <a:spcAft>
+                <a:spcPct val="0"/>
+              </a:spcAft>
+              <a:buClrTx/>
+              <a:buSzTx/>
+              <a:buFontTx/>
+              <a:buNone/>
+              <a:tabLst/>
+            </a:pPr>
+            <a:r>
+              <a:rPr kumimoji="0" lang="en-US" altLang="en-US" b="0" i="0" u="none" strike="noStrike" cap="none" normalizeH="0" baseline="0" dirty="0">
+                <a:ln>
+                  <a:noFill/>
+                </a:ln>
+                <a:solidFill>
+                  <a:srgbClr val="1F1F1F"/>
+                </a:solidFill>
+                <a:effectLst/>
+                <a:latin typeface="Google Sans Text"/>
+              </a:rPr>
+              <a:t>(b) FIGURE 1 shows a stationary alpha particle is accelerated at 7.86 x 10⁹ m s⁻² from the positive plate towards the negative plate. The alpha particle has a mass of 6.64 x 10⁻²⁷ kg and a charge of +2e travels between two parallel plates separated by 2.50 cm.</a:t>
+            </a:r>
+          </a:p>
+          <a:p>
+            <a:pPr marL="0" marR="0" lvl="0" indent="0" algn="l" defTabSz="914400" rtl="0" eaLnBrk="0" fontAlgn="base" latinLnBrk="0" hangingPunct="0">
+              <a:lnSpc>
+                <a:spcPct val="100000"/>
+              </a:lnSpc>
+              <a:spcBef>
+                <a:spcPct val="0"/>
+              </a:spcBef>
+              <a:spcAft>
+                <a:spcPct val="0"/>
+              </a:spcAft>
+              <a:buClrTx/>
+              <a:buSzTx/>
+              <a:buFontTx/>
+              <a:buNone/>
+              <a:tabLst/>
+            </a:pPr>
+            <a:r>
+              <a:rPr kumimoji="0" lang="en-US" altLang="en-US" b="0" i="0" u="none" strike="noStrike" cap="none" normalizeH="0" baseline="0" dirty="0">
+                <a:ln>
+                  <a:noFill/>
+                </a:ln>
+                <a:solidFill>
+                  <a:srgbClr val="1F1F1F"/>
+                </a:solidFill>
+                <a:effectLst/>
+                <a:latin typeface="Google Sans Text"/>
+              </a:rPr>
+              <a:t>(</a:t>
+            </a:r>
+            <a:r>
+              <a:rPr kumimoji="0" lang="en-US" altLang="en-US" b="0" i="0" u="none" strike="noStrike" cap="none" normalizeH="0" baseline="0" dirty="0" err="1">
+                <a:ln>
+                  <a:noFill/>
+                </a:ln>
+                <a:solidFill>
+                  <a:srgbClr val="1F1F1F"/>
+                </a:solidFill>
+                <a:effectLst/>
+                <a:latin typeface="Google Sans Text"/>
+              </a:rPr>
+              <a:t>i</a:t>
+            </a:r>
+            <a:r>
+              <a:rPr kumimoji="0" lang="en-US" altLang="en-US" b="0" i="0" u="none" strike="noStrike" cap="none" normalizeH="0" baseline="0" dirty="0">
+                <a:ln>
+                  <a:noFill/>
+                </a:ln>
+                <a:solidFill>
+                  <a:srgbClr val="1F1F1F"/>
+                </a:solidFill>
+                <a:effectLst/>
+                <a:latin typeface="Google Sans Text"/>
+              </a:rPr>
+              <a:t>) Calculate the magnitude of the electric field strength between the plates.</a:t>
+            </a:r>
+          </a:p>
+          <a:p>
+            <a:pPr marL="0" marR="0" lvl="0" indent="0" algn="l" defTabSz="914400" rtl="0" eaLnBrk="0" fontAlgn="base" latinLnBrk="0" hangingPunct="0">
+              <a:lnSpc>
+                <a:spcPct val="100000"/>
+              </a:lnSpc>
+              <a:spcBef>
+                <a:spcPct val="0"/>
+              </a:spcBef>
+              <a:spcAft>
+                <a:spcPct val="0"/>
+              </a:spcAft>
+              <a:buClrTx/>
+              <a:buSzTx/>
+              <a:buFontTx/>
+              <a:buNone/>
+              <a:tabLst/>
+            </a:pPr>
+            <a:r>
+              <a:rPr kumimoji="0" lang="en-US" altLang="en-US" b="0" i="0" u="none" strike="noStrike" cap="none" normalizeH="0" baseline="0" dirty="0">
+                <a:ln>
+                  <a:noFill/>
+                </a:ln>
+                <a:solidFill>
+                  <a:srgbClr val="1F1F1F"/>
+                </a:solidFill>
+                <a:effectLst/>
+                <a:latin typeface="Google Sans Text"/>
+              </a:rPr>
+              <a:t>(ii) Determine the time taken for the particle to reach the negative plate.</a:t>
+            </a:r>
+          </a:p>
+          <a:p>
+            <a:pPr algn="r" eaLnBrk="0" fontAlgn="base" hangingPunct="0">
+              <a:spcBef>
+                <a:spcPct val="0"/>
+              </a:spcBef>
+              <a:spcAft>
+                <a:spcPct val="0"/>
+              </a:spcAft>
+            </a:pPr>
+            <a:r>
+              <a:rPr lang="en-US" altLang="en-US" dirty="0">
+                <a:solidFill>
+                  <a:srgbClr val="1F1F1F"/>
+                </a:solidFill>
+                <a:latin typeface="Google Sans Text"/>
+              </a:rPr>
+              <a:t>[4 marks]</a:t>
+            </a:r>
+            <a:endParaRPr lang="en-US" altLang="en-US" dirty="0">
+              <a:latin typeface="Arial" panose="020B0604020202020204" pitchFamily="34" charset="0"/>
+            </a:endParaRPr>
+          </a:p>
+          <a:p>
+            <a:pPr marL="0" marR="0" lvl="0" indent="0" algn="l" defTabSz="914400" rtl="0" eaLnBrk="0" fontAlgn="base" latinLnBrk="0" hangingPunct="0">
+              <a:lnSpc>
+                <a:spcPct val="100000"/>
+              </a:lnSpc>
+              <a:spcBef>
+                <a:spcPct val="0"/>
+              </a:spcBef>
+              <a:spcAft>
+                <a:spcPct val="0"/>
+              </a:spcAft>
+              <a:buClrTx/>
+              <a:buSzTx/>
+              <a:buFontTx/>
+              <a:buNone/>
+              <a:tabLst/>
+            </a:pPr>
+            <a:endParaRPr kumimoji="0" lang="en-US" altLang="en-US" b="0" i="0" u="none" strike="noStrike" cap="none" normalizeH="0" baseline="0" dirty="0">
+              <a:ln>
+                <a:noFill/>
+              </a:ln>
+              <a:solidFill>
+                <a:srgbClr val="1F1F1F"/>
+              </a:solidFill>
+              <a:effectLst/>
+              <a:latin typeface="Google Sans Text"/>
+            </a:endParaRPr>
+          </a:p>
+        </p:txBody>
+      </p:sp>
+      <p:pic>
+        <p:nvPicPr>
+          <p:cNvPr id="16" name="Picture 15">
+            <a:extLst>
+              <a:ext uri="{FF2B5EF4-FFF2-40B4-BE49-F238E27FC236}">
+                <a16:creationId xmlns:a16="http://schemas.microsoft.com/office/drawing/2014/main" id="{0D57D29E-6197-EB87-A2F0-700AE0AE43BB}"/>
+              </a:ext>
+            </a:extLst>
+          </p:cNvPr>
+          <p:cNvPicPr>
+            <a:picLocks noChangeAspect="1"/>
+          </p:cNvPicPr>
+          <p:nvPr/>
+        </p:nvPicPr>
+        <p:blipFill>
+          <a:blip r:embed="rId3"/>
+          <a:stretch>
+            <a:fillRect/>
+          </a:stretch>
+        </p:blipFill>
+        <p:spPr>
+          <a:xfrm>
+            <a:off x="8715072" y="5277063"/>
+            <a:ext cx="3077004" cy="1000265"/>
+          </a:xfrm>
+          <a:prstGeom prst="rect">
+            <a:avLst/>
+          </a:prstGeom>
+        </p:spPr>
+      </p:pic>
+    </p:spTree>
+    <p:extLst>
+      <p:ext uri="{BB962C8B-B14F-4D97-AF65-F5344CB8AC3E}">
+        <p14:creationId xmlns:p14="http://schemas.microsoft.com/office/powerpoint/2010/main" val="3621411491"/>
+      </p:ext>
+    </p:extLst>
+  </p:cSld>
+  <p:clrMapOvr>
+    <a:masterClrMapping/>
+  </p:clrMapOvr>
+</p:sld>
+</file>
+
+<file path=ppt/slides/slide7.xml><?xml version="1.0" encoding="utf-8"?>
+<p:sld xmlns:a="http://schemas.openxmlformats.org/drawingml/2006/main" xmlns:r="http://schemas.openxmlformats.org/officeDocument/2006/relationships" xmlns:p="http://schemas.openxmlformats.org/presentationml/2006/main">
+  <p:cSld>
+    <p:spTree>
+      <p:nvGrpSpPr>
+        <p:cNvPr id="1" name=""/>
+        <p:cNvGrpSpPr/>
+        <p:nvPr/>
+      </p:nvGrpSpPr>
+      <p:grpSpPr>
+        <a:xfrm>
+          <a:off x="0" y="0"/>
+          <a:ext cx="0" cy="0"/>
+          <a:chOff x="0" y="0"/>
+          <a:chExt cx="0" cy="0"/>
+        </a:xfrm>
+      </p:grpSpPr>
+      <p:sp>
+        <p:nvSpPr>
+          <p:cNvPr id="5" name="TextBox 4">
+            <a:extLst>
+              <a:ext uri="{FF2B5EF4-FFF2-40B4-BE49-F238E27FC236}">
+                <a16:creationId xmlns:a16="http://schemas.microsoft.com/office/drawing/2014/main" id="{60693A95-9D45-1777-4F1C-ECEA9C359A07}"/>
+              </a:ext>
+            </a:extLst>
+          </p:cNvPr>
+          <p:cNvSpPr txBox="1"/>
+          <p:nvPr/>
+        </p:nvSpPr>
+        <p:spPr>
+          <a:xfrm>
+            <a:off x="3693806" y="568404"/>
+            <a:ext cx="7503846" cy="1200329"/>
+          </a:xfrm>
+          <a:prstGeom prst="rect">
+            <a:avLst/>
+          </a:prstGeom>
+          <a:noFill/>
+        </p:spPr>
+        <p:txBody>
+          <a:bodyPr wrap="square">
+            <a:spAutoFit/>
+          </a:bodyPr>
+          <a:lstStyle/>
+          <a:p>
+            <a:pPr marL="650240" marR="629285" algn="just">
+              <a:spcBef>
+                <a:spcPts val="1135"/>
+              </a:spcBef>
+              <a:buNone/>
+            </a:pPr>
+            <a:r>
+              <a:rPr lang="en-US" b="1" dirty="0">
+                <a:latin typeface="Times New Roman" panose="02020603050405020304" pitchFamily="18" charset="0"/>
+                <a:cs typeface="Times New Roman" panose="02020603050405020304" pitchFamily="18" charset="0"/>
+              </a:rPr>
+              <a:t>1. FIGURE 1</a:t>
+            </a:r>
+            <a:r>
+              <a:rPr lang="en-US" dirty="0">
+                <a:latin typeface="Times New Roman" panose="02020603050405020304" pitchFamily="18" charset="0"/>
+                <a:cs typeface="Times New Roman" panose="02020603050405020304" pitchFamily="18" charset="0"/>
+              </a:rPr>
+              <a:t> shows a point P is located at the midway between two points charges, Q₁ = +8 </a:t>
+            </a:r>
+            <a:r>
+              <a:rPr lang="en-US" dirty="0" err="1">
+                <a:latin typeface="Times New Roman" panose="02020603050405020304" pitchFamily="18" charset="0"/>
+                <a:cs typeface="Times New Roman" panose="02020603050405020304" pitchFamily="18" charset="0"/>
+              </a:rPr>
+              <a:t>μC</a:t>
+            </a:r>
+            <a:r>
+              <a:rPr lang="en-US" dirty="0">
+                <a:latin typeface="Times New Roman" panose="02020603050405020304" pitchFamily="18" charset="0"/>
+                <a:cs typeface="Times New Roman" panose="02020603050405020304" pitchFamily="18" charset="0"/>
+              </a:rPr>
+              <a:t> and Q₂ = -3 </a:t>
+            </a:r>
+            <a:r>
+              <a:rPr lang="en-US" dirty="0" err="1">
+                <a:latin typeface="Times New Roman" panose="02020603050405020304" pitchFamily="18" charset="0"/>
+                <a:cs typeface="Times New Roman" panose="02020603050405020304" pitchFamily="18" charset="0"/>
+              </a:rPr>
+              <a:t>μC</a:t>
+            </a:r>
+            <a:r>
+              <a:rPr lang="en-US" dirty="0">
+                <a:latin typeface="Times New Roman" panose="02020603050405020304" pitchFamily="18" charset="0"/>
+                <a:cs typeface="Times New Roman" panose="02020603050405020304" pitchFamily="18" charset="0"/>
+              </a:rPr>
+              <a:t>. Both charges are separated by a distance of 0.5 m. Another point Q located 0.6m from point P. Calculate the:</a:t>
+            </a:r>
+            <a:endParaRPr lang="en-MY" sz="1800" dirty="0">
+              <a:effectLst/>
+              <a:latin typeface="Times New Roman" panose="02020603050405020304" pitchFamily="18" charset="0"/>
+              <a:ea typeface="Times New Roman" panose="02020603050405020304" pitchFamily="18" charset="0"/>
+              <a:cs typeface="Times New Roman" panose="02020603050405020304" pitchFamily="18" charset="0"/>
+            </a:endParaRPr>
+          </a:p>
+        </p:txBody>
+      </p:sp>
+      <p:sp>
+        <p:nvSpPr>
+          <p:cNvPr id="13" name="TextBox 12">
+            <a:extLst>
+              <a:ext uri="{FF2B5EF4-FFF2-40B4-BE49-F238E27FC236}">
+                <a16:creationId xmlns:a16="http://schemas.microsoft.com/office/drawing/2014/main" id="{74F05CC4-9078-3BBD-633B-C826B145699B}"/>
+              </a:ext>
+            </a:extLst>
+          </p:cNvPr>
+          <p:cNvSpPr txBox="1"/>
+          <p:nvPr/>
+        </p:nvSpPr>
+        <p:spPr>
+          <a:xfrm>
+            <a:off x="4261762" y="2060410"/>
+            <a:ext cx="7151012" cy="2031325"/>
+          </a:xfrm>
+          <a:prstGeom prst="rect">
+            <a:avLst/>
+          </a:prstGeom>
+          <a:noFill/>
+        </p:spPr>
+        <p:txBody>
+          <a:bodyPr wrap="square">
+            <a:spAutoFit/>
+          </a:bodyPr>
+          <a:lstStyle/>
+          <a:p>
+            <a:r>
+              <a:rPr lang="en-US" b="1" dirty="0">
+                <a:latin typeface="Times New Roman" panose="02020603050405020304" pitchFamily="18" charset="0"/>
+                <a:cs typeface="Times New Roman" panose="02020603050405020304" pitchFamily="18" charset="0"/>
+              </a:rPr>
+              <a:t>a)</a:t>
+            </a:r>
+            <a:r>
+              <a:rPr lang="en-US" dirty="0">
+                <a:latin typeface="Times New Roman" panose="02020603050405020304" pitchFamily="18" charset="0"/>
+                <a:cs typeface="Times New Roman" panose="02020603050405020304" pitchFamily="18" charset="0"/>
+              </a:rPr>
+              <a:t> magnitude and direction of electrostatic force acting on charge Q₂. 							[3 marks]</a:t>
+            </a:r>
+          </a:p>
+          <a:p>
+            <a:r>
+              <a:rPr lang="en-US" b="1" dirty="0">
+                <a:latin typeface="Times New Roman" panose="02020603050405020304" pitchFamily="18" charset="0"/>
+                <a:cs typeface="Times New Roman" panose="02020603050405020304" pitchFamily="18" charset="0"/>
+              </a:rPr>
+              <a:t>b)</a:t>
+            </a:r>
+            <a:r>
+              <a:rPr lang="en-US" dirty="0">
+                <a:latin typeface="Times New Roman" panose="02020603050405020304" pitchFamily="18" charset="0"/>
+                <a:cs typeface="Times New Roman" panose="02020603050405020304" pitchFamily="18" charset="0"/>
+              </a:rPr>
+              <a:t> magnitude and direction of electric field strength at point P.</a:t>
+            </a:r>
+          </a:p>
+          <a:p>
+            <a:r>
+              <a:rPr lang="en-US" dirty="0">
+                <a:latin typeface="Times New Roman" panose="02020603050405020304" pitchFamily="18" charset="0"/>
+                <a:cs typeface="Times New Roman" panose="02020603050405020304" pitchFamily="18" charset="0"/>
+              </a:rPr>
+              <a:t> 						[4 marks]</a:t>
+            </a:r>
+          </a:p>
+          <a:p>
+            <a:r>
+              <a:rPr lang="en-US" b="1" dirty="0">
+                <a:latin typeface="Times New Roman" panose="02020603050405020304" pitchFamily="18" charset="0"/>
+                <a:cs typeface="Times New Roman" panose="02020603050405020304" pitchFamily="18" charset="0"/>
+              </a:rPr>
+              <a:t>c)</a:t>
+            </a:r>
+            <a:r>
+              <a:rPr lang="en-US" dirty="0">
+                <a:latin typeface="Times New Roman" panose="02020603050405020304" pitchFamily="18" charset="0"/>
+                <a:cs typeface="Times New Roman" panose="02020603050405020304" pitchFamily="18" charset="0"/>
+              </a:rPr>
+              <a:t> total electric potential at point Q.</a:t>
+            </a:r>
+          </a:p>
+          <a:p>
+            <a:r>
+              <a:rPr lang="en-US" dirty="0">
+                <a:latin typeface="Times New Roman" panose="02020603050405020304" pitchFamily="18" charset="0"/>
+                <a:cs typeface="Times New Roman" panose="02020603050405020304" pitchFamily="18" charset="0"/>
+              </a:rPr>
+              <a:t> 						[3 marks</a:t>
+            </a:r>
+            <a:r>
+              <a:rPr lang="ms-MY" spc="-10" dirty="0">
+                <a:latin typeface="Times New Roman" panose="02020603050405020304" pitchFamily="18" charset="0"/>
+                <a:cs typeface="Times New Roman" panose="02020603050405020304" pitchFamily="18" charset="0"/>
+              </a:rPr>
+              <a:t>]</a:t>
+            </a:r>
+            <a:r>
+              <a:rPr lang="ms-MY" sz="1800" spc="-10" dirty="0">
+                <a:effectLst/>
+                <a:latin typeface="Times New Roman" panose="02020603050405020304" pitchFamily="18" charset="0"/>
+                <a:ea typeface="Times New Roman" panose="02020603050405020304" pitchFamily="18" charset="0"/>
+                <a:cs typeface="Times New Roman" panose="02020603050405020304" pitchFamily="18" charset="0"/>
+              </a:rPr>
+              <a:t>		</a:t>
+            </a:r>
+            <a:endParaRPr lang="en-MY" sz="1800" spc="0" dirty="0">
+              <a:effectLst/>
+              <a:latin typeface="Times New Roman" panose="02020603050405020304" pitchFamily="18" charset="0"/>
+              <a:ea typeface="Times New Roman" panose="02020603050405020304" pitchFamily="18" charset="0"/>
+              <a:cs typeface="Times New Roman" panose="02020603050405020304" pitchFamily="18" charset="0"/>
+            </a:endParaRPr>
+          </a:p>
+        </p:txBody>
+      </p:sp>
+      <p:pic>
+        <p:nvPicPr>
+          <p:cNvPr id="3" name="Picture 2">
+            <a:extLst>
+              <a:ext uri="{FF2B5EF4-FFF2-40B4-BE49-F238E27FC236}">
+                <a16:creationId xmlns:a16="http://schemas.microsoft.com/office/drawing/2014/main" id="{358C64FB-17C8-329B-7109-4314BF885137}"/>
+              </a:ext>
+            </a:extLst>
+          </p:cNvPr>
+          <p:cNvPicPr>
+            <a:picLocks noChangeAspect="1"/>
+          </p:cNvPicPr>
+          <p:nvPr/>
+        </p:nvPicPr>
+        <p:blipFill>
+          <a:blip r:embed="rId2"/>
+          <a:stretch>
+            <a:fillRect/>
+          </a:stretch>
+        </p:blipFill>
+        <p:spPr>
+          <a:xfrm>
+            <a:off x="193734" y="276727"/>
+            <a:ext cx="4161000" cy="3152273"/>
+          </a:xfrm>
+          <a:prstGeom prst="rect">
+            <a:avLst/>
+          </a:prstGeom>
+        </p:spPr>
+      </p:pic>
+      <p:pic>
+        <p:nvPicPr>
+          <p:cNvPr id="4" name="Picture 3">
+            <a:extLst>
+              <a:ext uri="{FF2B5EF4-FFF2-40B4-BE49-F238E27FC236}">
+                <a16:creationId xmlns:a16="http://schemas.microsoft.com/office/drawing/2014/main" id="{E6959217-A3FD-984E-0CD6-1DE6ED0E1783}"/>
+              </a:ext>
+            </a:extLst>
+          </p:cNvPr>
+          <p:cNvPicPr>
+            <a:picLocks noChangeAspect="1"/>
+          </p:cNvPicPr>
+          <p:nvPr/>
+        </p:nvPicPr>
+        <p:blipFill>
+          <a:blip r:embed="rId3"/>
+          <a:stretch>
+            <a:fillRect/>
+          </a:stretch>
+        </p:blipFill>
+        <p:spPr>
+          <a:xfrm>
+            <a:off x="8357917" y="5934361"/>
+            <a:ext cx="3834083" cy="710469"/>
+          </a:xfrm>
+          <a:prstGeom prst="rect">
+            <a:avLst/>
+          </a:prstGeom>
+        </p:spPr>
+      </p:pic>
+    </p:spTree>
+    <p:extLst>
+      <p:ext uri="{BB962C8B-B14F-4D97-AF65-F5344CB8AC3E}">
+        <p14:creationId xmlns:p14="http://schemas.microsoft.com/office/powerpoint/2010/main" val="669943514"/>
+      </p:ext>
+    </p:extLst>
+  </p:cSld>
+  <p:clrMapOvr>
+    <a:masterClrMapping/>
+  </p:clrMapOvr>
+</p:sld>
+</file>
+
+<file path=ppt/slides/slide8.xml><?xml version="1.0" encoding="utf-8"?>
+<p:sld xmlns:a="http://schemas.openxmlformats.org/drawingml/2006/main" xmlns:r="http://schemas.openxmlformats.org/officeDocument/2006/relationships" xmlns:p="http://schemas.openxmlformats.org/presentationml/2006/main">
+  <p:cSld>
+    <p:spTree>
+      <p:nvGrpSpPr>
+        <p:cNvPr id="1" name=""/>
+        <p:cNvGrpSpPr/>
+        <p:nvPr/>
+      </p:nvGrpSpPr>
+      <p:grpSpPr>
+        <a:xfrm>
+          <a:off x="0" y="0"/>
+          <a:ext cx="0" cy="0"/>
+          <a:chOff x="0" y="0"/>
+          <a:chExt cx="0" cy="0"/>
+        </a:xfrm>
+      </p:grpSpPr>
+      <p:pic>
+        <p:nvPicPr>
+          <p:cNvPr id="3" name="Picture 2">
+            <a:extLst>
+              <a:ext uri="{FF2B5EF4-FFF2-40B4-BE49-F238E27FC236}">
+                <a16:creationId xmlns:a16="http://schemas.microsoft.com/office/drawing/2014/main" id="{9F6ECE09-775C-A37D-C240-25BC44653334}"/>
+              </a:ext>
+            </a:extLst>
+          </p:cNvPr>
+          <p:cNvPicPr>
+            <a:picLocks noChangeAspect="1"/>
+          </p:cNvPicPr>
+          <p:nvPr/>
+        </p:nvPicPr>
+        <p:blipFill>
+          <a:blip r:embed="rId2"/>
+          <a:stretch>
+            <a:fillRect/>
+          </a:stretch>
+        </p:blipFill>
+        <p:spPr>
+          <a:xfrm>
+            <a:off x="435429" y="514030"/>
+            <a:ext cx="2029108" cy="1295581"/>
+          </a:xfrm>
+          <a:prstGeom prst="rect">
+            <a:avLst/>
+          </a:prstGeom>
+        </p:spPr>
+      </p:pic>
+      <p:pic>
+        <p:nvPicPr>
+          <p:cNvPr id="9" name="Picture 8">
+            <a:extLst>
+              <a:ext uri="{FF2B5EF4-FFF2-40B4-BE49-F238E27FC236}">
+                <a16:creationId xmlns:a16="http://schemas.microsoft.com/office/drawing/2014/main" id="{5E2BBC16-E297-3AF6-DDF1-D8C193BCC52A}"/>
+              </a:ext>
+            </a:extLst>
+          </p:cNvPr>
+          <p:cNvPicPr>
+            <a:picLocks noChangeAspect="1"/>
+          </p:cNvPicPr>
+          <p:nvPr/>
+        </p:nvPicPr>
+        <p:blipFill>
+          <a:blip r:embed="rId3"/>
+          <a:stretch>
+            <a:fillRect/>
+          </a:stretch>
+        </p:blipFill>
+        <p:spPr>
+          <a:xfrm>
+            <a:off x="435429" y="2690623"/>
+            <a:ext cx="2114845" cy="1524213"/>
+          </a:xfrm>
+          <a:prstGeom prst="rect">
+            <a:avLst/>
+          </a:prstGeom>
+        </p:spPr>
+      </p:pic>
+      <p:sp>
+        <p:nvSpPr>
+          <p:cNvPr id="13" name="TextBox 12">
+            <a:extLst>
+              <a:ext uri="{FF2B5EF4-FFF2-40B4-BE49-F238E27FC236}">
+                <a16:creationId xmlns:a16="http://schemas.microsoft.com/office/drawing/2014/main" id="{05570AB0-1C2A-AF8C-9D5B-DE3FD9BCD483}"/>
+              </a:ext>
+            </a:extLst>
+          </p:cNvPr>
+          <p:cNvSpPr txBox="1"/>
+          <p:nvPr/>
+        </p:nvSpPr>
+        <p:spPr>
+          <a:xfrm>
+            <a:off x="3045823" y="514030"/>
+            <a:ext cx="8710748" cy="2031325"/>
+          </a:xfrm>
+          <a:prstGeom prst="rect">
+            <a:avLst/>
+          </a:prstGeom>
+          <a:noFill/>
+        </p:spPr>
+        <p:txBody>
+          <a:bodyPr wrap="square">
+            <a:spAutoFit/>
+          </a:bodyPr>
+          <a:lstStyle/>
+          <a:p>
+            <a:pPr marL="342900" indent="-342900">
+              <a:buAutoNum type="arabicPeriod"/>
+            </a:pPr>
+            <a:r>
+              <a:rPr lang="en-US" b="1" dirty="0">
+                <a:latin typeface="Times New Roman" panose="02020603050405020304" pitchFamily="18" charset="0"/>
+                <a:cs typeface="Times New Roman" panose="02020603050405020304" pitchFamily="18" charset="0"/>
+              </a:rPr>
+              <a:t>a)</a:t>
+            </a:r>
+            <a:r>
+              <a:rPr lang="en-US" dirty="0">
+                <a:latin typeface="Times New Roman" panose="02020603050405020304" pitchFamily="18" charset="0"/>
+                <a:cs typeface="Times New Roman" panose="02020603050405020304" pitchFamily="18" charset="0"/>
+              </a:rPr>
+              <a:t> </a:t>
+            </a:r>
+            <a:r>
+              <a:rPr lang="en-US" b="1" dirty="0">
+                <a:latin typeface="Times New Roman" panose="02020603050405020304" pitchFamily="18" charset="0"/>
+                <a:cs typeface="Times New Roman" panose="02020603050405020304" pitchFamily="18" charset="0"/>
+              </a:rPr>
+              <a:t>FIGURE 1a</a:t>
+            </a:r>
+            <a:r>
+              <a:rPr lang="en-US" dirty="0">
+                <a:latin typeface="Times New Roman" panose="02020603050405020304" pitchFamily="18" charset="0"/>
+                <a:cs typeface="Times New Roman" panose="02020603050405020304" pitchFamily="18" charset="0"/>
+              </a:rPr>
+              <a:t> shows two parallel plates </a:t>
+            </a:r>
+            <a:r>
+              <a:rPr lang="en-US" b="1" dirty="0">
+                <a:latin typeface="Times New Roman" panose="02020603050405020304" pitchFamily="18" charset="0"/>
+                <a:cs typeface="Times New Roman" panose="02020603050405020304" pitchFamily="18" charset="0"/>
+              </a:rPr>
+              <a:t>X</a:t>
+            </a:r>
+            <a:r>
+              <a:rPr lang="en-US" dirty="0">
+                <a:latin typeface="Times New Roman" panose="02020603050405020304" pitchFamily="18" charset="0"/>
+                <a:cs typeface="Times New Roman" panose="02020603050405020304" pitchFamily="18" charset="0"/>
+              </a:rPr>
+              <a:t> and </a:t>
+            </a:r>
+            <a:r>
+              <a:rPr lang="en-US" b="1" dirty="0">
+                <a:latin typeface="Times New Roman" panose="02020603050405020304" pitchFamily="18" charset="0"/>
+                <a:cs typeface="Times New Roman" panose="02020603050405020304" pitchFamily="18" charset="0"/>
+              </a:rPr>
+              <a:t>Y</a:t>
+            </a:r>
+            <a:r>
+              <a:rPr lang="en-US" dirty="0">
+                <a:latin typeface="Times New Roman" panose="02020603050405020304" pitchFamily="18" charset="0"/>
+                <a:cs typeface="Times New Roman" panose="02020603050405020304" pitchFamily="18" charset="0"/>
+              </a:rPr>
+              <a:t> with a separation distance of 20 cm. Potential difference between the plate is 20 V.</a:t>
+            </a:r>
+          </a:p>
+          <a:p>
+            <a:endParaRPr lang="en-US" dirty="0">
+              <a:latin typeface="Times New Roman" panose="02020603050405020304" pitchFamily="18" charset="0"/>
+              <a:cs typeface="Times New Roman" panose="02020603050405020304" pitchFamily="18" charset="0"/>
+            </a:endParaRPr>
+          </a:p>
+          <a:p>
+            <a:r>
+              <a:rPr lang="en-US" dirty="0">
+                <a:latin typeface="Times New Roman" panose="02020603050405020304" pitchFamily="18" charset="0"/>
+                <a:cs typeface="Times New Roman" panose="02020603050405020304" pitchFamily="18" charset="0"/>
+              </a:rPr>
+              <a:t> </a:t>
+            </a:r>
+            <a:r>
+              <a:rPr lang="en-US" dirty="0" err="1">
+                <a:latin typeface="Times New Roman" panose="02020603050405020304" pitchFamily="18" charset="0"/>
+                <a:cs typeface="Times New Roman" panose="02020603050405020304" pitchFamily="18" charset="0"/>
+              </a:rPr>
+              <a:t>i</a:t>
+            </a:r>
+            <a:r>
+              <a:rPr lang="en-US" dirty="0">
+                <a:latin typeface="Times New Roman" panose="02020603050405020304" pitchFamily="18" charset="0"/>
+                <a:cs typeface="Times New Roman" panose="02020603050405020304" pitchFamily="18" charset="0"/>
+              </a:rPr>
+              <a:t>) Calculate electric field strength between the plates. </a:t>
+            </a:r>
+          </a:p>
+          <a:p>
+            <a:r>
+              <a:rPr lang="en-US" dirty="0">
+                <a:latin typeface="Times New Roman" panose="02020603050405020304" pitchFamily="18" charset="0"/>
+                <a:cs typeface="Times New Roman" panose="02020603050405020304" pitchFamily="18" charset="0"/>
+              </a:rPr>
+              <a:t>ii) If an electron held at midpoint between the plates is released, calculate the acceleration for it to reach plate X. </a:t>
+            </a:r>
+          </a:p>
+          <a:p>
+            <a:pPr algn="r"/>
+            <a:r>
+              <a:rPr lang="en-US" dirty="0">
+                <a:latin typeface="Times New Roman" panose="02020603050405020304" pitchFamily="18" charset="0"/>
+                <a:cs typeface="Times New Roman" panose="02020603050405020304" pitchFamily="18" charset="0"/>
+              </a:rPr>
+              <a:t>[5 marks</a:t>
+            </a:r>
+            <a:r>
+              <a:rPr lang="en-US" dirty="0"/>
+              <a:t>]</a:t>
+            </a:r>
+            <a:endParaRPr lang="en-MY" dirty="0"/>
+          </a:p>
+        </p:txBody>
+      </p:sp>
+      <p:sp>
+        <p:nvSpPr>
+          <p:cNvPr id="17" name="TextBox 16">
+            <a:extLst>
+              <a:ext uri="{FF2B5EF4-FFF2-40B4-BE49-F238E27FC236}">
+                <a16:creationId xmlns:a16="http://schemas.microsoft.com/office/drawing/2014/main" id="{78E67A30-AE72-3A06-22CB-4B8B60950CE6}"/>
+              </a:ext>
+            </a:extLst>
+          </p:cNvPr>
+          <p:cNvSpPr txBox="1"/>
+          <p:nvPr/>
+        </p:nvSpPr>
+        <p:spPr>
+          <a:xfrm>
+            <a:off x="3050177" y="3217595"/>
+            <a:ext cx="8706394" cy="923330"/>
+          </a:xfrm>
+          <a:prstGeom prst="rect">
+            <a:avLst/>
+          </a:prstGeom>
+          <a:noFill/>
+        </p:spPr>
+        <p:txBody>
+          <a:bodyPr wrap="square">
+            <a:spAutoFit/>
+          </a:bodyPr>
+          <a:lstStyle/>
+          <a:p>
+            <a:r>
+              <a:rPr lang="en-US" b="1" dirty="0">
+                <a:latin typeface="Times New Roman" panose="02020603050405020304" pitchFamily="18" charset="0"/>
+                <a:cs typeface="Times New Roman" panose="02020603050405020304" pitchFamily="18" charset="0"/>
+              </a:rPr>
+              <a:t>b)</a:t>
+            </a:r>
+            <a:r>
+              <a:rPr lang="en-US" dirty="0">
+                <a:latin typeface="Times New Roman" panose="02020603050405020304" pitchFamily="18" charset="0"/>
+                <a:cs typeface="Times New Roman" panose="02020603050405020304" pitchFamily="18" charset="0"/>
+              </a:rPr>
+              <a:t> Two points charges, Q₁ = -12 </a:t>
+            </a:r>
+            <a:r>
+              <a:rPr lang="en-US" dirty="0" err="1">
+                <a:latin typeface="Times New Roman" panose="02020603050405020304" pitchFamily="18" charset="0"/>
+                <a:cs typeface="Times New Roman" panose="02020603050405020304" pitchFamily="18" charset="0"/>
+              </a:rPr>
+              <a:t>μC</a:t>
+            </a:r>
+            <a:r>
+              <a:rPr lang="en-US" dirty="0">
+                <a:latin typeface="Times New Roman" panose="02020603050405020304" pitchFamily="18" charset="0"/>
+                <a:cs typeface="Times New Roman" panose="02020603050405020304" pitchFamily="18" charset="0"/>
+              </a:rPr>
+              <a:t> and Q₂ = +8 </a:t>
+            </a:r>
+            <a:r>
+              <a:rPr lang="en-US" dirty="0" err="1">
+                <a:latin typeface="Times New Roman" panose="02020603050405020304" pitchFamily="18" charset="0"/>
+                <a:cs typeface="Times New Roman" panose="02020603050405020304" pitchFamily="18" charset="0"/>
+              </a:rPr>
+              <a:t>μC</a:t>
+            </a:r>
+            <a:r>
+              <a:rPr lang="en-US" dirty="0">
+                <a:latin typeface="Times New Roman" panose="02020603050405020304" pitchFamily="18" charset="0"/>
+                <a:cs typeface="Times New Roman" panose="02020603050405020304" pitchFamily="18" charset="0"/>
+              </a:rPr>
+              <a:t> are arranged as shown in </a:t>
+            </a:r>
+            <a:r>
+              <a:rPr lang="en-US" b="1" dirty="0">
+                <a:latin typeface="Times New Roman" panose="02020603050405020304" pitchFamily="18" charset="0"/>
+                <a:cs typeface="Times New Roman" panose="02020603050405020304" pitchFamily="18" charset="0"/>
+              </a:rPr>
+              <a:t>FIGURE 1b</a:t>
+            </a:r>
+            <a:r>
+              <a:rPr lang="en-US" dirty="0">
+                <a:latin typeface="Times New Roman" panose="02020603050405020304" pitchFamily="18" charset="0"/>
+                <a:cs typeface="Times New Roman" panose="02020603050405020304" pitchFamily="18" charset="0"/>
+              </a:rPr>
+              <a:t>. Calculate the magnitude and direction of the resultant electric field at the origin.</a:t>
+            </a:r>
+          </a:p>
+          <a:p>
+            <a:pPr algn="r"/>
+            <a:r>
+              <a:rPr lang="en-US" dirty="0">
+                <a:latin typeface="Times New Roman" panose="02020603050405020304" pitchFamily="18" charset="0"/>
+                <a:cs typeface="Times New Roman" panose="02020603050405020304" pitchFamily="18" charset="0"/>
+              </a:rPr>
+              <a:t> [5 marks</a:t>
+            </a:r>
+            <a:r>
+              <a:rPr lang="en-US" dirty="0"/>
+              <a:t>]</a:t>
+            </a:r>
+            <a:endParaRPr lang="en-MY" dirty="0"/>
+          </a:p>
+        </p:txBody>
+      </p:sp>
+      <p:sp>
+        <p:nvSpPr>
+          <p:cNvPr id="19" name="TextBox 18">
+            <a:extLst>
+              <a:ext uri="{FF2B5EF4-FFF2-40B4-BE49-F238E27FC236}">
+                <a16:creationId xmlns:a16="http://schemas.microsoft.com/office/drawing/2014/main" id="{9C3FA26C-9C69-299E-06BF-DC7CD8F15FFF}"/>
+              </a:ext>
+            </a:extLst>
+          </p:cNvPr>
+          <p:cNvSpPr txBox="1"/>
+          <p:nvPr/>
+        </p:nvSpPr>
+        <p:spPr>
+          <a:xfrm>
+            <a:off x="435429" y="2039917"/>
+            <a:ext cx="2235926" cy="369332"/>
+          </a:xfrm>
+          <a:prstGeom prst="rect">
+            <a:avLst/>
+          </a:prstGeom>
+          <a:noFill/>
+        </p:spPr>
+        <p:txBody>
+          <a:bodyPr wrap="square" rtlCol="0">
+            <a:spAutoFit/>
+          </a:bodyPr>
+          <a:lstStyle/>
+          <a:p>
+            <a:pPr algn="ctr"/>
+            <a:r>
+              <a:rPr lang="en-US" b="1" dirty="0">
+                <a:latin typeface="Times New Roman" panose="02020603050405020304" pitchFamily="18" charset="0"/>
+                <a:cs typeface="Times New Roman" panose="02020603050405020304" pitchFamily="18" charset="0"/>
+              </a:rPr>
+              <a:t>FIGURE 1a</a:t>
+            </a:r>
+            <a:endParaRPr lang="en-MY" dirty="0"/>
+          </a:p>
+        </p:txBody>
+      </p:sp>
+      <p:sp>
+        <p:nvSpPr>
+          <p:cNvPr id="20" name="TextBox 19">
+            <a:extLst>
+              <a:ext uri="{FF2B5EF4-FFF2-40B4-BE49-F238E27FC236}">
+                <a16:creationId xmlns:a16="http://schemas.microsoft.com/office/drawing/2014/main" id="{3AF189A8-9722-E205-230F-38658415A012}"/>
+              </a:ext>
+            </a:extLst>
+          </p:cNvPr>
+          <p:cNvSpPr txBox="1"/>
+          <p:nvPr/>
+        </p:nvSpPr>
+        <p:spPr>
+          <a:xfrm>
+            <a:off x="332020" y="4311544"/>
+            <a:ext cx="2235926" cy="369332"/>
+          </a:xfrm>
+          <a:prstGeom prst="rect">
+            <a:avLst/>
+          </a:prstGeom>
+          <a:noFill/>
+        </p:spPr>
+        <p:txBody>
+          <a:bodyPr wrap="square" rtlCol="0">
+            <a:spAutoFit/>
+          </a:bodyPr>
+          <a:lstStyle/>
+          <a:p>
+            <a:pPr algn="ctr"/>
+            <a:r>
+              <a:rPr lang="en-US" b="1" dirty="0">
+                <a:latin typeface="Times New Roman" panose="02020603050405020304" pitchFamily="18" charset="0"/>
+                <a:cs typeface="Times New Roman" panose="02020603050405020304" pitchFamily="18" charset="0"/>
+              </a:rPr>
+              <a:t>FIGURE 1b</a:t>
+            </a:r>
+            <a:endParaRPr lang="en-MY" dirty="0"/>
+          </a:p>
+        </p:txBody>
+      </p:sp>
+      <p:pic>
+        <p:nvPicPr>
+          <p:cNvPr id="24" name="Picture 23">
+            <a:extLst>
+              <a:ext uri="{FF2B5EF4-FFF2-40B4-BE49-F238E27FC236}">
+                <a16:creationId xmlns:a16="http://schemas.microsoft.com/office/drawing/2014/main" id="{FA320E65-E9EE-4EE1-FF82-9FFEC81157B3}"/>
+              </a:ext>
+            </a:extLst>
+          </p:cNvPr>
+          <p:cNvPicPr>
+            <a:picLocks noChangeAspect="1"/>
+          </p:cNvPicPr>
+          <p:nvPr/>
+        </p:nvPicPr>
+        <p:blipFill>
+          <a:blip r:embed="rId4"/>
+          <a:stretch>
+            <a:fillRect/>
+          </a:stretch>
+        </p:blipFill>
+        <p:spPr>
+          <a:xfrm>
+            <a:off x="7057308" y="5981969"/>
+            <a:ext cx="5134692" cy="724001"/>
+          </a:xfrm>
+          <a:prstGeom prst="rect">
+            <a:avLst/>
+          </a:prstGeom>
+        </p:spPr>
+      </p:pic>
+    </p:spTree>
+    <p:extLst>
+      <p:ext uri="{BB962C8B-B14F-4D97-AF65-F5344CB8AC3E}">
+        <p14:creationId xmlns:p14="http://schemas.microsoft.com/office/powerpoint/2010/main" val="586834488"/>
+      </p:ext>
+    </p:extLst>
+  </p:cSld>
+  <p:clrMapOvr>
+    <a:masterClrMapping/>
+  </p:clrMapOvr>
+</p:sld>
+</file>
+
+<file path=ppt/slides/slide9.xml><?xml version="1.0" encoding="utf-8"?>
+<p:sld xmlns:a="http://schemas.openxmlformats.org/drawingml/2006/main" xmlns:r="http://schemas.openxmlformats.org/officeDocument/2006/relationships" xmlns:p="http://schemas.openxmlformats.org/presentationml/2006/main">
+  <p:cSld>
+    <p:spTree>
+      <p:nvGrpSpPr>
+        <p:cNvPr id="1" name="">
+          <a:extLst>
+            <a:ext uri="{FF2B5EF4-FFF2-40B4-BE49-F238E27FC236}">
+              <a16:creationId xmlns:a16="http://schemas.microsoft.com/office/drawing/2014/main" id="{248652E4-8A51-DA94-FB9F-FC66D8D51E96}"/>
+            </a:ext>
+          </a:extLst>
+        </p:cNvPr>
+        <p:cNvGrpSpPr/>
+        <p:nvPr/>
+      </p:nvGrpSpPr>
+      <p:grpSpPr>
+        <a:xfrm>
+          <a:off x="0" y="0"/>
+          <a:ext cx="0" cy="0"/>
+          <a:chOff x="0" y="0"/>
+          <a:chExt cx="0" cy="0"/>
+        </a:xfrm>
+      </p:grpSpPr>
+      <p:sp>
+        <p:nvSpPr>
+          <p:cNvPr id="3" name="TextBox 2">
+            <a:extLst>
+              <a:ext uri="{FF2B5EF4-FFF2-40B4-BE49-F238E27FC236}">
+                <a16:creationId xmlns:a16="http://schemas.microsoft.com/office/drawing/2014/main" id="{6B60F2AA-DFEA-5837-CA76-E46E458057A4}"/>
+              </a:ext>
+            </a:extLst>
+          </p:cNvPr>
+          <p:cNvSpPr txBox="1"/>
+          <p:nvPr/>
+        </p:nvSpPr>
+        <p:spPr>
+          <a:xfrm>
+            <a:off x="3677193" y="766077"/>
+            <a:ext cx="8105503" cy="2308324"/>
+          </a:xfrm>
+          <a:prstGeom prst="rect">
+            <a:avLst/>
+          </a:prstGeom>
+          <a:noFill/>
+        </p:spPr>
+        <p:txBody>
+          <a:bodyPr wrap="square">
+            <a:spAutoFit/>
+          </a:bodyPr>
+          <a:lstStyle/>
+          <a:p>
+            <a:pPr>
+              <a:buNone/>
+            </a:pPr>
+            <a:r>
+              <a:rPr lang="en-US" dirty="0">
+                <a:latin typeface="Times New Roman" panose="02020603050405020304" pitchFamily="18" charset="0"/>
+                <a:cs typeface="Times New Roman" panose="02020603050405020304" pitchFamily="18" charset="0"/>
+              </a:rPr>
+              <a:t>1. FIGURE 1 shows two point charges Q₁ = +12 </a:t>
+            </a:r>
+            <a:r>
+              <a:rPr lang="en-US" dirty="0" err="1">
+                <a:latin typeface="Times New Roman" panose="02020603050405020304" pitchFamily="18" charset="0"/>
+                <a:cs typeface="Times New Roman" panose="02020603050405020304" pitchFamily="18" charset="0"/>
+              </a:rPr>
+              <a:t>μC</a:t>
+            </a:r>
+            <a:r>
+              <a:rPr lang="en-US" dirty="0">
+                <a:latin typeface="Times New Roman" panose="02020603050405020304" pitchFamily="18" charset="0"/>
+                <a:cs typeface="Times New Roman" panose="02020603050405020304" pitchFamily="18" charset="0"/>
+              </a:rPr>
+              <a:t> and Q₂ = –10 </a:t>
+            </a:r>
+            <a:r>
+              <a:rPr lang="en-US" dirty="0" err="1">
+                <a:latin typeface="Times New Roman" panose="02020603050405020304" pitchFamily="18" charset="0"/>
+                <a:cs typeface="Times New Roman" panose="02020603050405020304" pitchFamily="18" charset="0"/>
+              </a:rPr>
+              <a:t>μC</a:t>
+            </a:r>
+            <a:r>
+              <a:rPr lang="en-US" dirty="0">
+                <a:latin typeface="Times New Roman" panose="02020603050405020304" pitchFamily="18" charset="0"/>
+                <a:cs typeface="Times New Roman" panose="02020603050405020304" pitchFamily="18" charset="0"/>
+              </a:rPr>
+              <a:t>, placed 10 cm apart.</a:t>
+            </a:r>
+          </a:p>
+          <a:p>
+            <a:pPr marL="400050" indent="-400050">
+              <a:buAutoNum type="romanLcParenR"/>
+            </a:pPr>
+            <a:r>
+              <a:rPr lang="en-US" dirty="0">
+                <a:latin typeface="Times New Roman" panose="02020603050405020304" pitchFamily="18" charset="0"/>
+                <a:cs typeface="Times New Roman" panose="02020603050405020304" pitchFamily="18" charset="0"/>
+              </a:rPr>
+              <a:t>Calculate the Coulomb force on charge Q₁.</a:t>
+            </a:r>
+          </a:p>
+          <a:p>
+            <a:pPr marL="400050" indent="-400050">
+              <a:buAutoNum type="romanLcParenR"/>
+            </a:pPr>
+            <a:r>
+              <a:rPr lang="en-US" dirty="0">
+                <a:latin typeface="Times New Roman" panose="02020603050405020304" pitchFamily="18" charset="0"/>
+                <a:cs typeface="Times New Roman" panose="02020603050405020304" pitchFamily="18" charset="0"/>
+              </a:rPr>
+              <a:t>Calculate the work done to bring a positive test charge 2.0 × 10⁻⁷ C from infinity to point A.</a:t>
+            </a:r>
+          </a:p>
+          <a:p>
+            <a:pPr marL="400050" indent="-400050">
+              <a:buAutoNum type="romanLcParenR"/>
+            </a:pPr>
+            <a:r>
+              <a:rPr lang="en-US" dirty="0">
+                <a:latin typeface="Times New Roman" panose="02020603050405020304" pitchFamily="18" charset="0"/>
+                <a:cs typeface="Times New Roman" panose="02020603050405020304" pitchFamily="18" charset="0"/>
+              </a:rPr>
+              <a:t>Calculate the potential energy of the system when the positive test charge 2.0 × 10⁻⁷ C is located at A.</a:t>
+            </a:r>
+          </a:p>
+          <a:p>
+            <a:pPr algn="r">
+              <a:buNone/>
+            </a:pPr>
+            <a:r>
+              <a:rPr lang="en-US" dirty="0">
+                <a:latin typeface="Times New Roman" panose="02020603050405020304" pitchFamily="18" charset="0"/>
+                <a:cs typeface="Times New Roman" panose="02020603050405020304" pitchFamily="18" charset="0"/>
+              </a:rPr>
+              <a:t>[10 marks]</a:t>
+            </a:r>
+          </a:p>
+        </p:txBody>
+      </p:sp>
+      <p:pic>
+        <p:nvPicPr>
+          <p:cNvPr id="5" name="Picture 4">
+            <a:extLst>
+              <a:ext uri="{FF2B5EF4-FFF2-40B4-BE49-F238E27FC236}">
+                <a16:creationId xmlns:a16="http://schemas.microsoft.com/office/drawing/2014/main" id="{0CDCA012-87EC-E9D6-800A-987945DB0016}"/>
+              </a:ext>
+            </a:extLst>
+          </p:cNvPr>
+          <p:cNvPicPr>
+            <a:picLocks noChangeAspect="1"/>
+          </p:cNvPicPr>
+          <p:nvPr/>
+        </p:nvPicPr>
+        <p:blipFill>
+          <a:blip r:embed="rId2"/>
+          <a:stretch>
+            <a:fillRect/>
+          </a:stretch>
+        </p:blipFill>
+        <p:spPr>
+          <a:xfrm>
+            <a:off x="120546" y="766077"/>
+            <a:ext cx="3330480" cy="1778522"/>
+          </a:xfrm>
+          <a:prstGeom prst="rect">
+            <a:avLst/>
+          </a:prstGeom>
+        </p:spPr>
+      </p:pic>
+      <p:pic>
+        <p:nvPicPr>
+          <p:cNvPr id="7" name="Picture 6">
+            <a:extLst>
+              <a:ext uri="{FF2B5EF4-FFF2-40B4-BE49-F238E27FC236}">
+                <a16:creationId xmlns:a16="http://schemas.microsoft.com/office/drawing/2014/main" id="{72B095F2-DF75-9512-BDBE-ECB137FBD856}"/>
+              </a:ext>
+            </a:extLst>
+          </p:cNvPr>
+          <p:cNvPicPr>
+            <a:picLocks noChangeAspect="1"/>
+          </p:cNvPicPr>
+          <p:nvPr/>
+        </p:nvPicPr>
+        <p:blipFill>
+          <a:blip r:embed="rId3"/>
+          <a:stretch>
+            <a:fillRect/>
+          </a:stretch>
+        </p:blipFill>
+        <p:spPr>
+          <a:xfrm>
+            <a:off x="6895689" y="5701343"/>
+            <a:ext cx="4887007" cy="781159"/>
+          </a:xfrm>
+          <a:prstGeom prst="rect">
+            <a:avLst/>
+          </a:prstGeom>
+        </p:spPr>
+      </p:pic>
+    </p:spTree>
+    <p:extLst>
+      <p:ext uri="{BB962C8B-B14F-4D97-AF65-F5344CB8AC3E}">
+        <p14:creationId xmlns:p14="http://schemas.microsoft.com/office/powerpoint/2010/main" val="1717829851"/>
       </p:ext>
     </p:extLst>
   </p:cSld>
